--- a/outputs/Muhammad_Ali_Akbar_Al-Qahri_Portfolio_Minimal.pptx
+++ b/outputs/Muhammad_Ali_Akbar_Al-Qahri_Portfolio_Minimal.pptx
@@ -8822,7 +8822,7 @@
                 <a:ea typeface="Aptos"/>
                 <a:cs typeface="Aptos"/>
               </a:rPr>
-              <a:t>Business Intelligence Intern</a:t>
+              <a:t>Data Analyst Intern</a:t>
             </a:r>
           </a:p>
         </p:txBody>
@@ -9680,7 +9680,7 @@
                 <a:ea typeface="Aptos"/>
                 <a:cs typeface="Aptos"/>
               </a:rPr>
-              <a:t>Data Intelligence</a:t>
+              <a:t>Data Analyst</a:t>
             </a:r>
           </a:p>
         </p:txBody>
@@ -12573,7 +12573,7 @@
                 <a:ea typeface="Aptos"/>
                 <a:cs typeface="Aptos"/>
               </a:rPr>
-              <a:t>ypcemas.streamlit.app</a:t>
+              <a:t>saham-ipo.vercel.app</a:t>
             </a:r>
           </a:p>
         </p:txBody>

--- a/outputs/Muhammad_Ali_Akbar_Al-Qahri_Portfolio_Minimal.pptx
+++ b/outputs/Muhammad_Ali_Akbar_Al-Qahri_Portfolio_Minimal.pptx
@@ -2,23 +2,23 @@
 <file path=ppt/presentation.xml><?xml version="1.0" encoding="utf-8"?>
 <p:presentation xmlns:p="http://schemas.openxmlformats.org/presentationml/2006/main">
   <p:sldMasterIdLst>
-    <p:sldMasterId xmlns:r="http://schemas.openxmlformats.org/officeDocument/2006/relationships" id="2147483648" r:id="Rf1a087bbaf264984"/>
+    <p:sldMasterId xmlns:r="http://schemas.openxmlformats.org/officeDocument/2006/relationships" id="2147483648" r:id="R4594aa119f4a4ddd"/>
   </p:sldMasterIdLst>
   <p:notesMasterIdLst>
-    <p:notesMasterId xmlns:r="http://schemas.openxmlformats.org/officeDocument/2006/relationships" r:id="Rd16f9f97a7894b72"/>
+    <p:notesMasterId xmlns:r="http://schemas.openxmlformats.org/officeDocument/2006/relationships" r:id="Rc1ddbbf838ac4a54"/>
   </p:notesMasterIdLst>
   <p:sldIdLst>
-    <p:sldId xmlns:r="http://schemas.openxmlformats.org/officeDocument/2006/relationships" id="256" r:id="R677fcc0fb0574bed"/>
-    <p:sldId xmlns:r="http://schemas.openxmlformats.org/officeDocument/2006/relationships" id="257" r:id="R411bf1b1078840ad"/>
-    <p:sldId xmlns:r="http://schemas.openxmlformats.org/officeDocument/2006/relationships" id="258" r:id="R5309286bfb4c4aa7"/>
-    <p:sldId xmlns:r="http://schemas.openxmlformats.org/officeDocument/2006/relationships" id="259" r:id="Rff3ca7656f7c4bd3"/>
-    <p:sldId xmlns:r="http://schemas.openxmlformats.org/officeDocument/2006/relationships" id="260" r:id="Ra5f706675e4c47cd"/>
-    <p:sldId xmlns:r="http://schemas.openxmlformats.org/officeDocument/2006/relationships" id="261" r:id="R79abdc3ac2e14164"/>
-    <p:sldId xmlns:r="http://schemas.openxmlformats.org/officeDocument/2006/relationships" id="262" r:id="R98b6bf6cdf6143c0"/>
-    <p:sldId xmlns:r="http://schemas.openxmlformats.org/officeDocument/2006/relationships" id="263" r:id="R60642aacaabe4c20"/>
-    <p:sldId xmlns:r="http://schemas.openxmlformats.org/officeDocument/2006/relationships" id="264" r:id="Re0e749cf28044308"/>
-    <p:sldId xmlns:r="http://schemas.openxmlformats.org/officeDocument/2006/relationships" id="265" r:id="R874ca5266eea4855"/>
-    <p:sldId xmlns:r="http://schemas.openxmlformats.org/officeDocument/2006/relationships" id="266" r:id="Rb97166503acf4c0e"/>
+    <p:sldId xmlns:r="http://schemas.openxmlformats.org/officeDocument/2006/relationships" id="256" r:id="R0e4d6953df9f45d3"/>
+    <p:sldId xmlns:r="http://schemas.openxmlformats.org/officeDocument/2006/relationships" id="257" r:id="Ra1a41c12b5dd485f"/>
+    <p:sldId xmlns:r="http://schemas.openxmlformats.org/officeDocument/2006/relationships" id="258" r:id="R4503303dd79a4e6b"/>
+    <p:sldId xmlns:r="http://schemas.openxmlformats.org/officeDocument/2006/relationships" id="259" r:id="R4008bb91d60f4f00"/>
+    <p:sldId xmlns:r="http://schemas.openxmlformats.org/officeDocument/2006/relationships" id="260" r:id="R7132632c76d64cd6"/>
+    <p:sldId xmlns:r="http://schemas.openxmlformats.org/officeDocument/2006/relationships" id="261" r:id="R23942c1de6f34766"/>
+    <p:sldId xmlns:r="http://schemas.openxmlformats.org/officeDocument/2006/relationships" id="262" r:id="R0011c5c75a964dca"/>
+    <p:sldId xmlns:r="http://schemas.openxmlformats.org/officeDocument/2006/relationships" id="263" r:id="R9339e0cb7bfb47fd"/>
+    <p:sldId xmlns:r="http://schemas.openxmlformats.org/officeDocument/2006/relationships" id="264" r:id="R81b9f459ce8941b1"/>
+    <p:sldId xmlns:r="http://schemas.openxmlformats.org/officeDocument/2006/relationships" id="265" r:id="R41e18a73bdd643a2"/>
+    <p:sldId xmlns:r="http://schemas.openxmlformats.org/officeDocument/2006/relationships" id="266" r:id="R0322b827ca6d4bb7"/>
   </p:sldIdLst>
   <p:sldSz cx="12192000" cy="6858000"/>
   <p:notesSz cx="6858000" cy="9144000"/>
@@ -1271,7 +1271,7 @@
   </p:cSld>
   <p:clrMap bg1="lt1" tx1="dk1" bg2="lt2" tx2="dk2" accent1="accent1" accent2="accent2" accent3="accent3" accent4="accent4" accent5="accent5" accent6="accent6" hlink="hlink" folHlink="folHlink"/>
   <p:sldLayoutIdLst>
-    <p:sldLayoutId xmlns:r="http://schemas.openxmlformats.org/officeDocument/2006/relationships" id="2147483649" r:id="R4393454a78c64e16"/>
+    <p:sldLayoutId xmlns:r="http://schemas.openxmlformats.org/officeDocument/2006/relationships" id="2147483649" r:id="R35b10662b836423f"/>
   </p:sldLayoutIdLst>
   <p:txStyles>
     <p:titleStyle>
@@ -2683,7 +2683,7 @@
                 <a:ea typeface="Consolas"/>
                 <a:cs typeface="Consolas"/>
               </a:rPr>
-              <a:t>INDONESIA · OPEN TO WORK</a:t>
+              <a:t>FULL PORTFOLIO · CASE STUDIES · LIVE PROJECTS</a:t>
             </a:r>
           </a:p>
         </p:txBody>
@@ -2818,31 +2818,52 @@
         </p:spPr>
         <p:txBody>
           <a:bodyPr xmlns:a="http://schemas.openxmlformats.org/drawingml/2006/main" wrap="square" lIns="0" tIns="0" rIns="0" bIns="0" anchor="t">
-            <a:normAutofit/>
+            <a:normAutofit fontScale="100000"/>
           </a:bodyPr>
           <a:lstStyle xmlns:a="http://schemas.openxmlformats.org/drawingml/2006/main"/>
           <a:p xmlns:a="http://schemas.openxmlformats.org/drawingml/2006/main">
             <a:pPr algn="l">
-              <a:buNone/>
-              <a:defRPr sz="975" b="0">
+              <a:spcAft>
+                <a:spcPts val="4"/>
+              </a:spcAft>
+              <a:defRPr sz="975">
                 <a:solidFill>
                   <a:srgbClr val="FF755B"/>
                 </a:solidFill>
-                <a:latin typeface="Aptos"/>
-                <a:ea typeface="Aptos"/>
-                <a:cs typeface="Aptos"/>
-              </a:defRPr>
-            </a:pPr>
-            <a:r>
-              <a:rPr sz="975" b="0">
+              </a:defRPr>
+            </a:pPr>
+            <a:r>
+              <a:rPr sz="1350" b="1">
+                <a:solidFill>
+                  <a:srgbClr val="211B18"/>
+                </a:solidFill>
+                <a:latin typeface="Aptos"/>
+                <a:ea typeface="Aptos"/>
+                <a:cs typeface="Aptos"/>
+                <a:hlinkClick xmlns:r="http://schemas.openxmlformats.org/officeDocument/2006/relationships" r:id="Rfbbd9c0798314df0"/>
+              </a:rPr>
+              <a:t>OPEN THE COMPLETE WEB PORTFOLIO</a:t>
+            </a:r>
+          </a:p>
+          <a:p xmlns:a="http://schemas.openxmlformats.org/drawingml/2006/main">
+            <a:pPr algn="l">
+              <a:defRPr sz="975">
                 <a:solidFill>
                   <a:srgbClr val="FF755B"/>
                 </a:solidFill>
-                <a:latin typeface="Aptos"/>
-                <a:ea typeface="Aptos"/>
-                <a:cs typeface="Aptos"/>
-              </a:rPr>
-              <a:t/>
+              </a:defRPr>
+            </a:pPr>
+            <a:r>
+              <a:rPr sz="1050" b="1" u="sng">
+                <a:solidFill>
+                  <a:srgbClr val="FF755B"/>
+                </a:solidFill>
+                <a:latin typeface="Consolas"/>
+                <a:ea typeface="Consolas"/>
+                <a:cs typeface="Consolas"/>
+                <a:hlinkClick xmlns:r="http://schemas.openxmlformats.org/officeDocument/2006/relationships" r:id="Rda34b9b42acf4faf"/>
+              </a:rPr>
+              <a:t>akbaralqahri.github.io/portofolio</a:t>
             </a:r>
           </a:p>
         </p:txBody>
@@ -3063,7 +3084,7 @@
           <p:nvPr/>
         </p:nvPicPr>
         <p:blipFill>
-          <a:blip xmlns:r="http://schemas.openxmlformats.org/officeDocument/2006/relationships" xmlns:a="http://schemas.openxmlformats.org/drawingml/2006/main" r:embed="Re85f09cb28e348dc"/>
+          <a:blip xmlns:r="http://schemas.openxmlformats.org/officeDocument/2006/relationships" xmlns:a="http://schemas.openxmlformats.org/drawingml/2006/main" r:embed="R62a4c4d1a6544ecf"/>
           <a:srcRect xmlns:a="http://schemas.openxmlformats.org/drawingml/2006/main" l="0" t="28690" r="0" b="28690"/>
           <a:stretch xmlns:a="http://schemas.openxmlformats.org/drawingml/2006/main">
             <a:fillRect l="0" t="0" r="0" b="0"/>
@@ -4987,7 +5008,7 @@
                 <a:ea typeface="Consolas"/>
                 <a:cs typeface="Consolas"/>
               </a:rPr>
-              <a:t>DATA · MODELS · DECISIONS</a:t>
+              <a:t>MORE PROJECTS · FULL CASE STUDIES</a:t>
             </a:r>
           </a:p>
         </p:txBody>
@@ -5008,8 +5029,8 @@
         </p:nvSpPr>
         <p:spPr>
           <a:xfrm xmlns:a="http://schemas.openxmlformats.org/drawingml/2006/main">
-            <a:off x="514350" y="5314950"/>
-            <a:ext cx="3219450" cy="228600"/>
+            <a:off x="590550" y="5219700"/>
+            <a:ext cx="3143250" cy="552450"/>
           </a:xfrm>
           <a:prstGeom xmlns:a="http://schemas.openxmlformats.org/drawingml/2006/main" prst="rect">
             <a:avLst/>
@@ -5022,48 +5043,336 @@
           <a:lstStyle xmlns:a="http://schemas.openxmlformats.org/drawingml/2006/main"/>
           <a:p xmlns:a="http://schemas.openxmlformats.org/drawingml/2006/main">
             <a:pPr algn="ctr">
-              <a:buNone/>
-              <a:defRPr sz="975" b="0">
+              <a:spcAft>
+                <a:spcPts val="3"/>
+              </a:spcAft>
+              <a:defRPr sz="975">
+                <a:solidFill>
+                  <a:srgbClr val="FF755B"/>
+                </a:solidFill>
+              </a:defRPr>
+            </a:pPr>
+            <a:r>
+              <a:rPr sz="1125" b="1">
+                <a:solidFill>
+                  <a:srgbClr val="211B18"/>
+                </a:solidFill>
+                <a:latin typeface="Aptos"/>
+                <a:ea typeface="Aptos"/>
+                <a:cs typeface="Aptos"/>
+                <a:hlinkClick xmlns:r="http://schemas.openxmlformats.org/officeDocument/2006/relationships" r:id="R233e3b9576d24db1"/>
+              </a:rPr>
+              <a:t>OPEN THE WEB PORTFOLIO</a:t>
+            </a:r>
+          </a:p>
+          <a:p xmlns:a="http://schemas.openxmlformats.org/drawingml/2006/main">
+            <a:pPr algn="ctr">
+              <a:defRPr sz="975">
+                <a:solidFill>
+                  <a:srgbClr val="FF755B"/>
+                </a:solidFill>
+              </a:defRPr>
+            </a:pPr>
+            <a:r>
+              <a:rPr sz="900" b="1" u="sng">
                 <a:solidFill>
                   <a:srgbClr val="FF755B"/>
                 </a:solidFill>
                 <a:latin typeface="Consolas"/>
                 <a:ea typeface="Consolas"/>
                 <a:cs typeface="Consolas"/>
-              </a:defRPr>
-            </a:pPr>
-            <a:r>
-              <a:rPr sz="975" b="0">
-                <a:solidFill>
-                  <a:srgbClr val="FF755B"/>
+                <a:hlinkClick xmlns:r="http://schemas.openxmlformats.org/officeDocument/2006/relationships" r:id="Rc54eaf3d1c6f4cb6"/>
+              </a:rPr>
+              <a:t>akbaralqahri.github.io/portofolio</a:t>
+            </a:r>
+          </a:p>
+        </p:txBody>
+      </p:sp>
+      <p:sp>
+        <p:nvSpPr>
+          <p:cNvPr id="12" name="closing-title">
+            <a:extLst xmlns:a="http://schemas.openxmlformats.org/drawingml/2006/main">
+              <a:ext uri="{FF2B5EF4-FFF2-40B4-BE49-F238E27FC236}">
+                <a16:creationId xmlns:a16="http://schemas.microsoft.com/office/drawing/2014/main" id="{9E3EBE82-0CD6-4E7D-AFA4-A323C5C4F279}"/>
+              </a:ext>
+            </a:extLst>
+          </p:cNvPr>
+          <p:cNvSpPr>
+            <a:spLocks xmlns:a="http://schemas.openxmlformats.org/drawingml/2006/main" noGrp="1"/>
+          </p:cNvSpPr>
+          <p:nvPr/>
+        </p:nvSpPr>
+        <p:spPr>
+          <a:xfrm xmlns:a="http://schemas.openxmlformats.org/drawingml/2006/main">
+            <a:off x="4972050" y="876300"/>
+            <a:ext cx="6438900" cy="1466850"/>
+          </a:xfrm>
+          <a:prstGeom xmlns:a="http://schemas.openxmlformats.org/drawingml/2006/main" prst="rect">
+            <a:avLst/>
+          </a:prstGeom>
+        </p:spPr>
+        <p:txBody>
+          <a:bodyPr xmlns:a="http://schemas.openxmlformats.org/drawingml/2006/main" wrap="square" lIns="0" tIns="0" rIns="0" bIns="0" anchor="t">
+            <a:normAutofit fontScale="100000"/>
+          </a:bodyPr>
+          <a:lstStyle xmlns:a="http://schemas.openxmlformats.org/drawingml/2006/main"/>
+          <a:p xmlns:a="http://schemas.openxmlformats.org/drawingml/2006/main">
+            <a:pPr algn="l">
+              <a:buNone/>
+              <a:defRPr sz="2850" b="1">
+                <a:solidFill>
+                  <a:srgbClr val="211B18"/>
+                </a:solidFill>
+                <a:latin typeface="Aptos"/>
+                <a:ea typeface="Aptos"/>
+                <a:cs typeface="Aptos"/>
+              </a:defRPr>
+            </a:pPr>
+            <a:r>
+              <a:rPr sz="2850" b="1">
+                <a:solidFill>
+                  <a:srgbClr val="211B18"/>
+                </a:solidFill>
+                <a:latin typeface="Aptos"/>
+                <a:ea typeface="Aptos"/>
+                <a:cs typeface="Aptos"/>
+              </a:rPr>
+              <a:t>Let's build decisions</a:t>
+            </a:r>
+          </a:p>
+          <a:p xmlns:a="http://schemas.openxmlformats.org/drawingml/2006/main">
+            <a:pPr algn="l">
+              <a:buNone/>
+              <a:defRPr sz="2850" b="1">
+                <a:solidFill>
+                  <a:srgbClr val="211B18"/>
+                </a:solidFill>
+                <a:latin typeface="Aptos"/>
+                <a:ea typeface="Aptos"/>
+                <a:cs typeface="Aptos"/>
+              </a:defRPr>
+            </a:pPr>
+            <a:r>
+              <a:rPr sz="2850" b="1">
+                <a:solidFill>
+                  <a:srgbClr val="211B18"/>
+                </a:solidFill>
+                <a:latin typeface="Aptos"/>
+                <a:ea typeface="Aptos"/>
+                <a:cs typeface="Aptos"/>
+              </a:rPr>
+              <a:t>people can act on.</a:t>
+            </a:r>
+          </a:p>
+        </p:txBody>
+      </p:sp>
+      <p:sp>
+        <p:nvSpPr>
+          <p:cNvPr id="13" name="closing-copy">
+            <a:extLst xmlns:a="http://schemas.openxmlformats.org/drawingml/2006/main">
+              <a:ext uri="{FF2B5EF4-FFF2-40B4-BE49-F238E27FC236}">
+                <a16:creationId xmlns:a16="http://schemas.microsoft.com/office/drawing/2014/main" id="{917C73F8-1261-42EB-B2F1-1413AA2EBDA5}"/>
+              </a:ext>
+            </a:extLst>
+          </p:cNvPr>
+          <p:cNvSpPr>
+            <a:spLocks xmlns:a="http://schemas.openxmlformats.org/drawingml/2006/main" noGrp="1"/>
+          </p:cNvSpPr>
+          <p:nvPr/>
+        </p:nvSpPr>
+        <p:spPr>
+          <a:xfrm xmlns:a="http://schemas.openxmlformats.org/drawingml/2006/main">
+            <a:off x="5010150" y="2705100"/>
+            <a:ext cx="5905500" cy="723900"/>
+          </a:xfrm>
+          <a:prstGeom xmlns:a="http://schemas.openxmlformats.org/drawingml/2006/main" prst="rect">
+            <a:avLst/>
+          </a:prstGeom>
+        </p:spPr>
+        <p:txBody>
+          <a:bodyPr xmlns:a="http://schemas.openxmlformats.org/drawingml/2006/main" wrap="square" lIns="0" tIns="0" rIns="0" bIns="0" anchor="t">
+            <a:normAutofit fontScale="100000"/>
+          </a:bodyPr>
+          <a:lstStyle xmlns:a="http://schemas.openxmlformats.org/drawingml/2006/main"/>
+          <a:p xmlns:a="http://schemas.openxmlformats.org/drawingml/2006/main">
+            <a:pPr algn="l">
+              <a:buNone/>
+              <a:defRPr sz="1200" b="0">
+                <a:solidFill>
+                  <a:srgbClr val="6D625B"/>
+                </a:solidFill>
+                <a:latin typeface="Aptos"/>
+                <a:ea typeface="Aptos"/>
+                <a:cs typeface="Aptos"/>
+              </a:defRPr>
+            </a:pPr>
+            <a:r>
+              <a:rPr sz="1200" b="0">
+                <a:solidFill>
+                  <a:srgbClr val="6D625B"/>
+                </a:solidFill>
+                <a:latin typeface="Aptos"/>
+                <a:ea typeface="Aptos"/>
+                <a:cs typeface="Aptos"/>
+              </a:rPr>
+              <a:t>Available for data analyst, business intelligence, data science, and data engineering opportunities.</a:t>
+            </a:r>
+          </a:p>
+        </p:txBody>
+      </p:sp>
+      <p:sp>
+        <p:nvSpPr>
+          <p:cNvPr id="14" name="closing-line-gold">
+            <a:extLst xmlns:a="http://schemas.openxmlformats.org/drawingml/2006/main">
+              <a:ext uri="{FF2B5EF4-FFF2-40B4-BE49-F238E27FC236}">
+                <a16:creationId xmlns:a16="http://schemas.microsoft.com/office/drawing/2014/main" id="{02DC13A4-8A83-480D-B481-1B0AFB93135F}"/>
+              </a:ext>
+            </a:extLst>
+          </p:cNvPr>
+          <p:cNvSpPr>
+            <a:spLocks xmlns:a="http://schemas.openxmlformats.org/drawingml/2006/main" noGrp="1"/>
+          </p:cNvSpPr>
+          <p:nvPr/>
+        </p:nvSpPr>
+        <p:spPr>
+          <a:xfrm xmlns:a="http://schemas.openxmlformats.org/drawingml/2006/main">
+            <a:off x="5010150" y="3838575"/>
+            <a:ext cx="3067050" cy="19050"/>
+          </a:xfrm>
+          <a:prstGeom xmlns:a="http://schemas.openxmlformats.org/drawingml/2006/main" prst="rect">
+            <a:avLst/>
+          </a:prstGeom>
+          <a:solidFill xmlns:a="http://schemas.openxmlformats.org/drawingml/2006/main">
+            <a:srgbClr val="F6C453"/>
+          </a:solidFill>
+        </p:spPr>
+      </p:sp>
+      <p:sp>
+        <p:nvSpPr>
+          <p:cNvPr id="15" name="closing-line-coral">
+            <a:extLst xmlns:a="http://schemas.openxmlformats.org/drawingml/2006/main">
+              <a:ext uri="{FF2B5EF4-FFF2-40B4-BE49-F238E27FC236}">
+                <a16:creationId xmlns:a16="http://schemas.microsoft.com/office/drawing/2014/main" id="{6A984643-99C1-493E-9A6B-AA9BBCA33249}"/>
+              </a:ext>
+            </a:extLst>
+          </p:cNvPr>
+          <p:cNvSpPr>
+            <a:spLocks xmlns:a="http://schemas.openxmlformats.org/drawingml/2006/main" noGrp="1"/>
+          </p:cNvSpPr>
+          <p:nvPr/>
+        </p:nvSpPr>
+        <p:spPr>
+          <a:xfrm xmlns:a="http://schemas.openxmlformats.org/drawingml/2006/main">
+            <a:off x="8077200" y="3838575"/>
+            <a:ext cx="1533525" cy="19050"/>
+          </a:xfrm>
+          <a:prstGeom xmlns:a="http://schemas.openxmlformats.org/drawingml/2006/main" prst="rect">
+            <a:avLst/>
+          </a:prstGeom>
+          <a:solidFill xmlns:a="http://schemas.openxmlformats.org/drawingml/2006/main">
+            <a:srgbClr val="FF7A59"/>
+          </a:solidFill>
+        </p:spPr>
+      </p:sp>
+      <p:sp>
+        <p:nvSpPr>
+          <p:cNvPr id="16" name="closing-line-teal">
+            <a:extLst xmlns:a="http://schemas.openxmlformats.org/drawingml/2006/main">
+              <a:ext uri="{FF2B5EF4-FFF2-40B4-BE49-F238E27FC236}">
+                <a16:creationId xmlns:a16="http://schemas.microsoft.com/office/drawing/2014/main" id="{F7ED0AC9-EF48-4FEF-8A96-D742A6BDE36F}"/>
+              </a:ext>
+            </a:extLst>
+          </p:cNvPr>
+          <p:cNvSpPr>
+            <a:spLocks xmlns:a="http://schemas.openxmlformats.org/drawingml/2006/main" noGrp="1"/>
+          </p:cNvSpPr>
+          <p:nvPr/>
+        </p:nvSpPr>
+        <p:spPr>
+          <a:xfrm xmlns:a="http://schemas.openxmlformats.org/drawingml/2006/main">
+            <a:off x="9610725" y="3838575"/>
+            <a:ext cx="1533525" cy="19050"/>
+          </a:xfrm>
+          <a:prstGeom xmlns:a="http://schemas.openxmlformats.org/drawingml/2006/main" prst="rect">
+            <a:avLst/>
+          </a:prstGeom>
+          <a:solidFill xmlns:a="http://schemas.openxmlformats.org/drawingml/2006/main">
+            <a:srgbClr val="5EEAD4"/>
+          </a:solidFill>
+        </p:spPr>
+      </p:sp>
+      <p:sp>
+        <p:nvSpPr>
+          <p:cNvPr id="17" name="closing-email-label">
+            <a:extLst xmlns:a="http://schemas.openxmlformats.org/drawingml/2006/main">
+              <a:ext uri="{FF2B5EF4-FFF2-40B4-BE49-F238E27FC236}">
+                <a16:creationId xmlns:a16="http://schemas.microsoft.com/office/drawing/2014/main" id="{ACDB15F7-0D53-4E5D-907F-D5602C4D8FB2}"/>
+              </a:ext>
+            </a:extLst>
+          </p:cNvPr>
+          <p:cNvSpPr>
+            <a:spLocks xmlns:a="http://schemas.openxmlformats.org/drawingml/2006/main" noGrp="1"/>
+          </p:cNvSpPr>
+          <p:nvPr/>
+        </p:nvSpPr>
+        <p:spPr>
+          <a:xfrm xmlns:a="http://schemas.openxmlformats.org/drawingml/2006/main">
+            <a:off x="5010150" y="4105275"/>
+            <a:ext cx="1428750" cy="190500"/>
+          </a:xfrm>
+          <a:prstGeom xmlns:a="http://schemas.openxmlformats.org/drawingml/2006/main" prst="rect">
+            <a:avLst/>
+          </a:prstGeom>
+        </p:spPr>
+        <p:txBody>
+          <a:bodyPr xmlns:a="http://schemas.openxmlformats.org/drawingml/2006/main" wrap="square" lIns="0" tIns="0" rIns="0" bIns="0" anchor="t">
+            <a:normAutofit fontScale="79365"/>
+          </a:bodyPr>
+          <a:lstStyle xmlns:a="http://schemas.openxmlformats.org/drawingml/2006/main"/>
+          <a:p xmlns:a="http://schemas.openxmlformats.org/drawingml/2006/main">
+            <a:pPr algn="l">
+              <a:buNone/>
+              <a:defRPr sz="1575" b="1">
+                <a:solidFill>
+                  <a:srgbClr val="211B18"/>
                 </a:solidFill>
                 <a:latin typeface="Consolas"/>
                 <a:ea typeface="Consolas"/>
                 <a:cs typeface="Consolas"/>
-              </a:rPr>
-              <a:t>akbaralqahri.github.io/portofolio</a:t>
-            </a:r>
-          </a:p>
-        </p:txBody>
-      </p:sp>
-      <p:sp>
-        <p:nvSpPr>
-          <p:cNvPr id="12" name="closing-title">
-            <a:extLst xmlns:a="http://schemas.openxmlformats.org/drawingml/2006/main">
-              <a:ext uri="{FF2B5EF4-FFF2-40B4-BE49-F238E27FC236}">
-                <a16:creationId xmlns:a16="http://schemas.microsoft.com/office/drawing/2014/main" id="{9E3EBE82-0CD6-4E7D-AFA4-A323C5C4F279}"/>
-              </a:ext>
-            </a:extLst>
-          </p:cNvPr>
-          <p:cNvSpPr>
-            <a:spLocks xmlns:a="http://schemas.openxmlformats.org/drawingml/2006/main" noGrp="1"/>
-          </p:cNvSpPr>
-          <p:nvPr/>
-        </p:nvSpPr>
-        <p:spPr>
-          <a:xfrm xmlns:a="http://schemas.openxmlformats.org/drawingml/2006/main">
-            <a:off x="4972050" y="876300"/>
-            <a:ext cx="6438900" cy="1466850"/>
+              </a:defRPr>
+            </a:pPr>
+            <a:r>
+              <a:rPr sz="1575" b="1">
+                <a:solidFill>
+                  <a:srgbClr val="211B18"/>
+                </a:solidFill>
+                <a:latin typeface="Consolas"/>
+                <a:ea typeface="Consolas"/>
+                <a:cs typeface="Consolas"/>
+              </a:rPr>
+              <a:t>EMAIL</a:t>
+            </a:r>
+          </a:p>
+        </p:txBody>
+      </p:sp>
+      <p:sp>
+        <p:nvSpPr>
+          <p:cNvPr id="18" name="closing-email">
+            <a:extLst xmlns:a="http://schemas.openxmlformats.org/drawingml/2006/main">
+              <a:ext uri="{FF2B5EF4-FFF2-40B4-BE49-F238E27FC236}">
+                <a16:creationId xmlns:a16="http://schemas.microsoft.com/office/drawing/2014/main" id="{5D990C17-3E5D-40D8-89EC-9583370D0C0E}"/>
+              </a:ext>
+            </a:extLst>
+          </p:cNvPr>
+          <p:cNvSpPr>
+            <a:spLocks xmlns:a="http://schemas.openxmlformats.org/drawingml/2006/main" noGrp="1"/>
+          </p:cNvSpPr>
+          <p:nvPr/>
+        </p:nvSpPr>
+        <p:spPr>
+          <a:xfrm xmlns:a="http://schemas.openxmlformats.org/drawingml/2006/main">
+            <a:off x="5010150" y="4362450"/>
+            <a:ext cx="4762500" cy="295275"/>
           </a:xfrm>
           <a:prstGeom xmlns:a="http://schemas.openxmlformats.org/drawingml/2006/main" prst="rect">
             <a:avLst/>
@@ -5077,71 +5386,47 @@
           <a:p xmlns:a="http://schemas.openxmlformats.org/drawingml/2006/main">
             <a:pPr algn="l">
               <a:buNone/>
-              <a:defRPr sz="2850" b="1">
-                <a:solidFill>
-                  <a:srgbClr val="211B18"/>
-                </a:solidFill>
-                <a:latin typeface="Aptos"/>
-                <a:ea typeface="Aptos"/>
-                <a:cs typeface="Aptos"/>
-              </a:defRPr>
-            </a:pPr>
-            <a:r>
-              <a:rPr sz="2850" b="1">
-                <a:solidFill>
-                  <a:srgbClr val="211B18"/>
-                </a:solidFill>
-                <a:latin typeface="Aptos"/>
-                <a:ea typeface="Aptos"/>
-                <a:cs typeface="Aptos"/>
-              </a:rPr>
-              <a:t>Let's build decisions</a:t>
-            </a:r>
-          </a:p>
-          <a:p xmlns:a="http://schemas.openxmlformats.org/drawingml/2006/main">
-            <a:pPr algn="l">
-              <a:buNone/>
-              <a:defRPr sz="2850" b="1">
-                <a:solidFill>
-                  <a:srgbClr val="211B18"/>
-                </a:solidFill>
-                <a:latin typeface="Aptos"/>
-                <a:ea typeface="Aptos"/>
-                <a:cs typeface="Aptos"/>
-              </a:defRPr>
-            </a:pPr>
-            <a:r>
-              <a:rPr sz="2850" b="1">
-                <a:solidFill>
-                  <a:srgbClr val="211B18"/>
-                </a:solidFill>
-                <a:latin typeface="Aptos"/>
-                <a:ea typeface="Aptos"/>
-                <a:cs typeface="Aptos"/>
-              </a:rPr>
-              <a:t>people can act on.</a:t>
-            </a:r>
-          </a:p>
-        </p:txBody>
-      </p:sp>
-      <p:sp>
-        <p:nvSpPr>
-          <p:cNvPr id="13" name="closing-copy">
-            <a:extLst xmlns:a="http://schemas.openxmlformats.org/drawingml/2006/main">
-              <a:ext uri="{FF2B5EF4-FFF2-40B4-BE49-F238E27FC236}">
-                <a16:creationId xmlns:a16="http://schemas.microsoft.com/office/drawing/2014/main" id="{917C73F8-1261-42EB-B2F1-1413AA2EBDA5}"/>
-              </a:ext>
-            </a:extLst>
-          </p:cNvPr>
-          <p:cNvSpPr>
-            <a:spLocks xmlns:a="http://schemas.openxmlformats.org/drawingml/2006/main" noGrp="1"/>
-          </p:cNvSpPr>
-          <p:nvPr/>
-        </p:nvSpPr>
-        <p:spPr>
-          <a:xfrm xmlns:a="http://schemas.openxmlformats.org/drawingml/2006/main">
-            <a:off x="5010150" y="2705100"/>
-            <a:ext cx="5905500" cy="723900"/>
+              <a:defRPr sz="1575" b="1">
+                <a:solidFill>
+                  <a:srgbClr val="211B18"/>
+                </a:solidFill>
+                <a:latin typeface="Aptos"/>
+                <a:ea typeface="Aptos"/>
+                <a:cs typeface="Aptos"/>
+              </a:defRPr>
+            </a:pPr>
+            <a:r>
+              <a:rPr sz="1575" b="1">
+                <a:solidFill>
+                  <a:srgbClr val="211B18"/>
+                </a:solidFill>
+                <a:latin typeface="Aptos"/>
+                <a:ea typeface="Aptos"/>
+                <a:cs typeface="Aptos"/>
+              </a:rPr>
+              <a:t>akbaralqahri@gmail.com</a:t>
+            </a:r>
+          </a:p>
+        </p:txBody>
+      </p:sp>
+      <p:sp>
+        <p:nvSpPr>
+          <p:cNvPr id="19" name="closing-links">
+            <a:extLst xmlns:a="http://schemas.openxmlformats.org/drawingml/2006/main">
+              <a:ext uri="{FF2B5EF4-FFF2-40B4-BE49-F238E27FC236}">
+                <a16:creationId xmlns:a16="http://schemas.microsoft.com/office/drawing/2014/main" id="{7AE9283C-20F7-46CE-A6FA-B2DA7AC2E7B5}"/>
+              </a:ext>
+            </a:extLst>
+          </p:cNvPr>
+          <p:cNvSpPr>
+            <a:spLocks xmlns:a="http://schemas.openxmlformats.org/drawingml/2006/main" noGrp="1"/>
+          </p:cNvSpPr>
+          <p:nvPr/>
+        </p:nvSpPr>
+        <p:spPr>
+          <a:xfrm xmlns:a="http://schemas.openxmlformats.org/drawingml/2006/main">
+            <a:off x="5010150" y="4933950"/>
+            <a:ext cx="5334000" cy="628650"/>
           </a:xfrm>
           <a:prstGeom xmlns:a="http://schemas.openxmlformats.org/drawingml/2006/main" prst="rect">
             <a:avLst/>
@@ -5154,293 +5439,44 @@
           <a:lstStyle xmlns:a="http://schemas.openxmlformats.org/drawingml/2006/main"/>
           <a:p xmlns:a="http://schemas.openxmlformats.org/drawingml/2006/main">
             <a:pPr algn="l">
-              <a:buNone/>
-              <a:defRPr sz="1200" b="0">
+              <a:defRPr sz="1200">
                 <a:solidFill>
                   <a:srgbClr val="6D625B"/>
                 </a:solidFill>
-                <a:latin typeface="Aptos"/>
-                <a:ea typeface="Aptos"/>
-                <a:cs typeface="Aptos"/>
-              </a:defRPr>
-            </a:pPr>
-            <a:r>
-              <a:rPr sz="1200" b="0">
+              </a:defRPr>
+            </a:pPr>
+            <a:r>
+              <a:rPr sz="1125">
                 <a:solidFill>
                   <a:srgbClr val="6D625B"/>
                 </a:solidFill>
                 <a:latin typeface="Aptos"/>
                 <a:ea typeface="Aptos"/>
                 <a:cs typeface="Aptos"/>
-              </a:rPr>
-              <a:t>Available for data analyst, business intelligence, data science, and data engineering opportunities.</a:t>
-            </a:r>
-          </a:p>
-        </p:txBody>
-      </p:sp>
-      <p:sp>
-        <p:nvSpPr>
-          <p:cNvPr id="14" name="closing-line-gold">
-            <a:extLst xmlns:a="http://schemas.openxmlformats.org/drawingml/2006/main">
-              <a:ext uri="{FF2B5EF4-FFF2-40B4-BE49-F238E27FC236}">
-                <a16:creationId xmlns:a16="http://schemas.microsoft.com/office/drawing/2014/main" id="{02DC13A4-8A83-480D-B481-1B0AFB93135F}"/>
-              </a:ext>
-            </a:extLst>
-          </p:cNvPr>
-          <p:cNvSpPr>
-            <a:spLocks xmlns:a="http://schemas.openxmlformats.org/drawingml/2006/main" noGrp="1"/>
-          </p:cNvSpPr>
-          <p:nvPr/>
-        </p:nvSpPr>
-        <p:spPr>
-          <a:xfrm xmlns:a="http://schemas.openxmlformats.org/drawingml/2006/main">
-            <a:off x="5010150" y="3838575"/>
-            <a:ext cx="3067050" cy="19050"/>
-          </a:xfrm>
-          <a:prstGeom xmlns:a="http://schemas.openxmlformats.org/drawingml/2006/main" prst="rect">
-            <a:avLst/>
-          </a:prstGeom>
-          <a:solidFill xmlns:a="http://schemas.openxmlformats.org/drawingml/2006/main">
-            <a:srgbClr val="F6C453"/>
-          </a:solidFill>
-        </p:spPr>
-      </p:sp>
-      <p:sp>
-        <p:nvSpPr>
-          <p:cNvPr id="15" name="closing-line-coral">
-            <a:extLst xmlns:a="http://schemas.openxmlformats.org/drawingml/2006/main">
-              <a:ext uri="{FF2B5EF4-FFF2-40B4-BE49-F238E27FC236}">
-                <a16:creationId xmlns:a16="http://schemas.microsoft.com/office/drawing/2014/main" id="{6A984643-99C1-493E-9A6B-AA9BBCA33249}"/>
-              </a:ext>
-            </a:extLst>
-          </p:cNvPr>
-          <p:cNvSpPr>
-            <a:spLocks xmlns:a="http://schemas.openxmlformats.org/drawingml/2006/main" noGrp="1"/>
-          </p:cNvSpPr>
-          <p:nvPr/>
-        </p:nvSpPr>
-        <p:spPr>
-          <a:xfrm xmlns:a="http://schemas.openxmlformats.org/drawingml/2006/main">
-            <a:off x="8077200" y="3838575"/>
-            <a:ext cx="1533525" cy="19050"/>
-          </a:xfrm>
-          <a:prstGeom xmlns:a="http://schemas.openxmlformats.org/drawingml/2006/main" prst="rect">
-            <a:avLst/>
-          </a:prstGeom>
-          <a:solidFill xmlns:a="http://schemas.openxmlformats.org/drawingml/2006/main">
-            <a:srgbClr val="FF7A59"/>
-          </a:solidFill>
-        </p:spPr>
-      </p:sp>
-      <p:sp>
-        <p:nvSpPr>
-          <p:cNvPr id="16" name="closing-line-teal">
-            <a:extLst xmlns:a="http://schemas.openxmlformats.org/drawingml/2006/main">
-              <a:ext uri="{FF2B5EF4-FFF2-40B4-BE49-F238E27FC236}">
-                <a16:creationId xmlns:a16="http://schemas.microsoft.com/office/drawing/2014/main" id="{F7ED0AC9-EF48-4FEF-8A96-D742A6BDE36F}"/>
-              </a:ext>
-            </a:extLst>
-          </p:cNvPr>
-          <p:cNvSpPr>
-            <a:spLocks xmlns:a="http://schemas.openxmlformats.org/drawingml/2006/main" noGrp="1"/>
-          </p:cNvSpPr>
-          <p:nvPr/>
-        </p:nvSpPr>
-        <p:spPr>
-          <a:xfrm xmlns:a="http://schemas.openxmlformats.org/drawingml/2006/main">
-            <a:off x="9610725" y="3838575"/>
-            <a:ext cx="1533525" cy="19050"/>
-          </a:xfrm>
-          <a:prstGeom xmlns:a="http://schemas.openxmlformats.org/drawingml/2006/main" prst="rect">
-            <a:avLst/>
-          </a:prstGeom>
-          <a:solidFill xmlns:a="http://schemas.openxmlformats.org/drawingml/2006/main">
-            <a:srgbClr val="5EEAD4"/>
-          </a:solidFill>
-        </p:spPr>
-      </p:sp>
-      <p:sp>
-        <p:nvSpPr>
-          <p:cNvPr id="17" name="closing-email-label">
-            <a:extLst xmlns:a="http://schemas.openxmlformats.org/drawingml/2006/main">
-              <a:ext uri="{FF2B5EF4-FFF2-40B4-BE49-F238E27FC236}">
-                <a16:creationId xmlns:a16="http://schemas.microsoft.com/office/drawing/2014/main" id="{ACDB15F7-0D53-4E5D-907F-D5602C4D8FB2}"/>
-              </a:ext>
-            </a:extLst>
-          </p:cNvPr>
-          <p:cNvSpPr>
-            <a:spLocks xmlns:a="http://schemas.openxmlformats.org/drawingml/2006/main" noGrp="1"/>
-          </p:cNvSpPr>
-          <p:nvPr/>
-        </p:nvSpPr>
-        <p:spPr>
-          <a:xfrm xmlns:a="http://schemas.openxmlformats.org/drawingml/2006/main">
-            <a:off x="5010150" y="4105275"/>
-            <a:ext cx="1428750" cy="190500"/>
-          </a:xfrm>
-          <a:prstGeom xmlns:a="http://schemas.openxmlformats.org/drawingml/2006/main" prst="rect">
-            <a:avLst/>
-          </a:prstGeom>
-        </p:spPr>
-        <p:txBody>
-          <a:bodyPr xmlns:a="http://schemas.openxmlformats.org/drawingml/2006/main" wrap="square" lIns="0" tIns="0" rIns="0" bIns="0" anchor="t">
-            <a:normAutofit fontScale="79365"/>
-          </a:bodyPr>
-          <a:lstStyle xmlns:a="http://schemas.openxmlformats.org/drawingml/2006/main"/>
+                <a:hlinkClick xmlns:r="http://schemas.openxmlformats.org/officeDocument/2006/relationships" r:id="Rd8e66261b1504020"/>
+              </a:rPr>
+              <a:t>LINKEDIN · linkedin.com/in/akbaralqahri</a:t>
+            </a:r>
+          </a:p>
           <a:p xmlns:a="http://schemas.openxmlformats.org/drawingml/2006/main">
             <a:pPr algn="l">
-              <a:buNone/>
-              <a:defRPr sz="1575" b="1">
-                <a:solidFill>
-                  <a:srgbClr val="211B18"/>
-                </a:solidFill>
-                <a:latin typeface="Consolas"/>
-                <a:ea typeface="Consolas"/>
-                <a:cs typeface="Consolas"/>
-              </a:defRPr>
-            </a:pPr>
-            <a:r>
-              <a:rPr sz="1575" b="1">
-                <a:solidFill>
-                  <a:srgbClr val="211B18"/>
-                </a:solidFill>
-                <a:latin typeface="Consolas"/>
-                <a:ea typeface="Consolas"/>
-                <a:cs typeface="Consolas"/>
-              </a:rPr>
-              <a:t>EMAIL</a:t>
-            </a:r>
-          </a:p>
-        </p:txBody>
-      </p:sp>
-      <p:sp>
-        <p:nvSpPr>
-          <p:cNvPr id="18" name="closing-email">
-            <a:extLst xmlns:a="http://schemas.openxmlformats.org/drawingml/2006/main">
-              <a:ext uri="{FF2B5EF4-FFF2-40B4-BE49-F238E27FC236}">
-                <a16:creationId xmlns:a16="http://schemas.microsoft.com/office/drawing/2014/main" id="{5D990C17-3E5D-40D8-89EC-9583370D0C0E}"/>
-              </a:ext>
-            </a:extLst>
-          </p:cNvPr>
-          <p:cNvSpPr>
-            <a:spLocks xmlns:a="http://schemas.openxmlformats.org/drawingml/2006/main" noGrp="1"/>
-          </p:cNvSpPr>
-          <p:nvPr/>
-        </p:nvSpPr>
-        <p:spPr>
-          <a:xfrm xmlns:a="http://schemas.openxmlformats.org/drawingml/2006/main">
-            <a:off x="5010150" y="4362450"/>
-            <a:ext cx="4762500" cy="295275"/>
-          </a:xfrm>
-          <a:prstGeom xmlns:a="http://schemas.openxmlformats.org/drawingml/2006/main" prst="rect">
-            <a:avLst/>
-          </a:prstGeom>
-        </p:spPr>
-        <p:txBody>
-          <a:bodyPr xmlns:a="http://schemas.openxmlformats.org/drawingml/2006/main" wrap="square" lIns="0" tIns="0" rIns="0" bIns="0" anchor="t">
-            <a:normAutofit fontScale="100000"/>
-          </a:bodyPr>
-          <a:lstStyle xmlns:a="http://schemas.openxmlformats.org/drawingml/2006/main"/>
-          <a:p xmlns:a="http://schemas.openxmlformats.org/drawingml/2006/main">
-            <a:pPr algn="l">
-              <a:buNone/>
-              <a:defRPr sz="1575" b="1">
-                <a:solidFill>
-                  <a:srgbClr val="211B18"/>
-                </a:solidFill>
-                <a:latin typeface="Aptos"/>
-                <a:ea typeface="Aptos"/>
-                <a:cs typeface="Aptos"/>
-              </a:defRPr>
-            </a:pPr>
-            <a:r>
-              <a:rPr sz="1575" b="1">
-                <a:solidFill>
-                  <a:srgbClr val="211B18"/>
-                </a:solidFill>
-                <a:latin typeface="Aptos"/>
-                <a:ea typeface="Aptos"/>
-                <a:cs typeface="Aptos"/>
-              </a:rPr>
-              <a:t>akbaralqahri@gmail.com</a:t>
-            </a:r>
-          </a:p>
-        </p:txBody>
-      </p:sp>
-      <p:sp>
-        <p:nvSpPr>
-          <p:cNvPr id="19" name="closing-links">
-            <a:extLst xmlns:a="http://schemas.openxmlformats.org/drawingml/2006/main">
-              <a:ext uri="{FF2B5EF4-FFF2-40B4-BE49-F238E27FC236}">
-                <a16:creationId xmlns:a16="http://schemas.microsoft.com/office/drawing/2014/main" id="{7AE9283C-20F7-46CE-A6FA-B2DA7AC2E7B5}"/>
-              </a:ext>
-            </a:extLst>
-          </p:cNvPr>
-          <p:cNvSpPr>
-            <a:spLocks xmlns:a="http://schemas.openxmlformats.org/drawingml/2006/main" noGrp="1"/>
-          </p:cNvSpPr>
-          <p:nvPr/>
-        </p:nvSpPr>
-        <p:spPr>
-          <a:xfrm xmlns:a="http://schemas.openxmlformats.org/drawingml/2006/main">
-            <a:off x="5010150" y="4933950"/>
-            <a:ext cx="5334000" cy="628650"/>
-          </a:xfrm>
-          <a:prstGeom xmlns:a="http://schemas.openxmlformats.org/drawingml/2006/main" prst="rect">
-            <a:avLst/>
-          </a:prstGeom>
-        </p:spPr>
-        <p:txBody>
-          <a:bodyPr xmlns:a="http://schemas.openxmlformats.org/drawingml/2006/main" wrap="square" lIns="0" tIns="0" rIns="0" bIns="0" anchor="t">
-            <a:normAutofit fontScale="100000"/>
-          </a:bodyPr>
-          <a:lstStyle xmlns:a="http://schemas.openxmlformats.org/drawingml/2006/main"/>
-          <a:p xmlns:a="http://schemas.openxmlformats.org/drawingml/2006/main">
-            <a:pPr algn="l">
-              <a:buNone/>
-              <a:defRPr sz="1200" b="0">
+              <a:defRPr sz="1200">
                 <a:solidFill>
                   <a:srgbClr val="6D625B"/>
                 </a:solidFill>
-                <a:latin typeface="Aptos"/>
-                <a:ea typeface="Aptos"/>
-                <a:cs typeface="Aptos"/>
-              </a:defRPr>
-            </a:pPr>
-            <a:r>
-              <a:rPr sz="1200" b="0">
-                <a:solidFill>
-                  <a:srgbClr val="6D625B"/>
-                </a:solidFill>
-                <a:latin typeface="Aptos"/>
-                <a:ea typeface="Aptos"/>
-                <a:cs typeface="Aptos"/>
-              </a:rPr>
-              <a:t>linkedin.com/in/akbaralqahri</a:t>
-            </a:r>
-          </a:p>
-          <a:p xmlns:a="http://schemas.openxmlformats.org/drawingml/2006/main">
-            <a:pPr algn="l">
-              <a:buNone/>
-              <a:defRPr sz="1200" b="0">
-                <a:solidFill>
-                  <a:srgbClr val="6D625B"/>
-                </a:solidFill>
-                <a:latin typeface="Aptos"/>
-                <a:ea typeface="Aptos"/>
-                <a:cs typeface="Aptos"/>
-              </a:defRPr>
-            </a:pPr>
-            <a:r>
-              <a:rPr sz="1200" b="0">
-                <a:solidFill>
-                  <a:srgbClr val="6D625B"/>
-                </a:solidFill>
-                <a:latin typeface="Aptos"/>
-                <a:ea typeface="Aptos"/>
-                <a:cs typeface="Aptos"/>
-              </a:rPr>
-              <a:t>akbaralqahri.github.io/portofolio</a:t>
+              </a:defRPr>
+            </a:pPr>
+            <a:r>
+              <a:rPr sz="1125" b="1" u="sng">
+                <a:solidFill>
+                  <a:srgbClr val="FF755B"/>
+                </a:solidFill>
+                <a:latin typeface="Aptos"/>
+                <a:ea typeface="Aptos"/>
+                <a:cs typeface="Aptos"/>
+                <a:hlinkClick xmlns:r="http://schemas.openxmlformats.org/officeDocument/2006/relationships" r:id="R0dd2d9736e0c4e1f"/>
+              </a:rPr>
+              <a:t>WEB PORTFOLIO · akbaralqahri.github.io/portofolio</a:t>
             </a:r>
           </a:p>
         </p:txBody>
@@ -5562,7 +5598,7 @@
           <p:nvPr/>
         </p:nvPicPr>
         <p:blipFill>
-          <a:blip xmlns:r="http://schemas.openxmlformats.org/officeDocument/2006/relationships" xmlns:a="http://schemas.openxmlformats.org/drawingml/2006/main" r:embed="R03d7eeaa846549ee"/>
+          <a:blip xmlns:r="http://schemas.openxmlformats.org/officeDocument/2006/relationships" xmlns:a="http://schemas.openxmlformats.org/drawingml/2006/main" r:embed="R7510773e6fc644c1"/>
           <a:srcRect xmlns:a="http://schemas.openxmlformats.org/drawingml/2006/main" l="0" t="5980" r="0" b="5980"/>
           <a:stretch xmlns:a="http://schemas.openxmlformats.org/drawingml/2006/main">
             <a:fillRect l="0" t="0" r="0" b="0"/>
@@ -8822,7 +8858,7 @@
                 <a:ea typeface="Aptos"/>
                 <a:cs typeface="Aptos"/>
               </a:rPr>
-              <a:t>Data Analyst Intern</a:t>
+              <a:t>Business Intelligence Intern</a:t>
             </a:r>
           </a:p>
         </p:txBody>
@@ -9680,7 +9716,7 @@
                 <a:ea typeface="Aptos"/>
                 <a:cs typeface="Aptos"/>
               </a:rPr>
-              <a:t>Data Analyst</a:t>
+              <a:t>Data Intelligence</a:t>
             </a:r>
           </a:p>
         </p:txBody>
@@ -10987,7 +11023,7 @@
           <p:nvPr/>
         </p:nvPicPr>
         <p:blipFill>
-          <a:blip xmlns:r="http://schemas.openxmlformats.org/officeDocument/2006/relationships" xmlns:a="http://schemas.openxmlformats.org/drawingml/2006/main" r:embed="R84d6699790424bca"/>
+          <a:blip xmlns:r="http://schemas.openxmlformats.org/officeDocument/2006/relationships" xmlns:a="http://schemas.openxmlformats.org/drawingml/2006/main" r:embed="R0f2c9b8df90d4734"/>
           <a:srcRect xmlns:a="http://schemas.openxmlformats.org/drawingml/2006/main" l="0" t="874" r="0" b="874"/>
           <a:stretch xmlns:a="http://schemas.openxmlformats.org/drawingml/2006/main">
             <a:fillRect l="0" t="0" r="0" b="0"/>
@@ -11954,7 +11990,7 @@
           <p:nvPr/>
         </p:nvPicPr>
         <p:blipFill>
-          <a:blip xmlns:r="http://schemas.openxmlformats.org/officeDocument/2006/relationships" xmlns:a="http://schemas.openxmlformats.org/drawingml/2006/main" r:embed="R4e698d41e4f14a03"/>
+          <a:blip xmlns:r="http://schemas.openxmlformats.org/officeDocument/2006/relationships" xmlns:a="http://schemas.openxmlformats.org/drawingml/2006/main" r:embed="R52866994abab479c"/>
           <a:srcRect xmlns:a="http://schemas.openxmlformats.org/drawingml/2006/main" l="0" t="5719" r="0" b="5719"/>
           <a:stretch xmlns:a="http://schemas.openxmlformats.org/drawingml/2006/main">
             <a:fillRect l="0" t="0" r="0" b="0"/>
@@ -11981,7 +12017,7 @@
           <p:nvPr/>
         </p:nvPicPr>
         <p:blipFill>
-          <a:blip xmlns:r="http://schemas.openxmlformats.org/officeDocument/2006/relationships" xmlns:a="http://schemas.openxmlformats.org/drawingml/2006/main" r:embed="R5c2a701d8bde41de"/>
+          <a:blip xmlns:r="http://schemas.openxmlformats.org/officeDocument/2006/relationships" xmlns:a="http://schemas.openxmlformats.org/drawingml/2006/main" r:embed="R433b47aeeff34aaa"/>
           <a:srcRect xmlns:a="http://schemas.openxmlformats.org/drawingml/2006/main" l="0" t="5719" r="0" b="5719"/>
           <a:stretch xmlns:a="http://schemas.openxmlformats.org/drawingml/2006/main">
             <a:fillRect l="0" t="0" r="0" b="0"/>
@@ -12573,7 +12609,7 @@
                 <a:ea typeface="Aptos"/>
                 <a:cs typeface="Aptos"/>
               </a:rPr>
-              <a:t>saham-ipo.vercel.app</a:t>
+              <a:t>ypcemas.streamlit.app</a:t>
             </a:r>
           </a:p>
         </p:txBody>
@@ -12980,7 +13016,7 @@
           <p:nvPr/>
         </p:nvPicPr>
         <p:blipFill>
-          <a:blip xmlns:r="http://schemas.openxmlformats.org/officeDocument/2006/relationships" xmlns:a="http://schemas.openxmlformats.org/drawingml/2006/main" r:embed="R96e7ca511fa74bce"/>
+          <a:blip xmlns:r="http://schemas.openxmlformats.org/officeDocument/2006/relationships" xmlns:a="http://schemas.openxmlformats.org/drawingml/2006/main" r:embed="Rf95911cb68e34420"/>
           <a:stretch xmlns:a="http://schemas.openxmlformats.org/drawingml/2006/main"/>
         </p:blipFill>
         <p:spPr>
@@ -13004,7 +13040,7 @@
           <p:nvPr/>
         </p:nvPicPr>
         <p:blipFill>
-          <a:blip xmlns:r="http://schemas.openxmlformats.org/officeDocument/2006/relationships" xmlns:a="http://schemas.openxmlformats.org/drawingml/2006/main" r:embed="R4cfcabd73ae7439d"/>
+          <a:blip xmlns:r="http://schemas.openxmlformats.org/officeDocument/2006/relationships" xmlns:a="http://schemas.openxmlformats.org/drawingml/2006/main" r:embed="Rad630dfb40784425"/>
           <a:stretch xmlns:a="http://schemas.openxmlformats.org/drawingml/2006/main"/>
         </p:blipFill>
         <p:spPr>
@@ -14046,7 +14082,7 @@
           <p:nvPr/>
         </p:nvPicPr>
         <p:blipFill>
-          <a:blip xmlns:r="http://schemas.openxmlformats.org/officeDocument/2006/relationships" xmlns:a="http://schemas.openxmlformats.org/drawingml/2006/main" r:embed="R4935006e008f4133"/>
+          <a:blip xmlns:r="http://schemas.openxmlformats.org/officeDocument/2006/relationships" xmlns:a="http://schemas.openxmlformats.org/drawingml/2006/main" r:embed="Rc9ab358b9ba24a8f"/>
           <a:srcRect xmlns:a="http://schemas.openxmlformats.org/drawingml/2006/main" l="0" t="4261" r="0" b="4261"/>
           <a:stretch xmlns:a="http://schemas.openxmlformats.org/drawingml/2006/main">
             <a:fillRect l="0" t="0" r="0" b="0"/>
@@ -15032,7 +15068,7 @@
           <p:nvPr/>
         </p:nvPicPr>
         <p:blipFill>
-          <a:blip xmlns:r="http://schemas.openxmlformats.org/officeDocument/2006/relationships" xmlns:a="http://schemas.openxmlformats.org/drawingml/2006/main" r:embed="R567873e945df4dfa"/>
+          <a:blip xmlns:r="http://schemas.openxmlformats.org/officeDocument/2006/relationships" xmlns:a="http://schemas.openxmlformats.org/drawingml/2006/main" r:embed="Rbfec85385b1649f9"/>
           <a:srcRect xmlns:a="http://schemas.openxmlformats.org/drawingml/2006/main" l="10463" t="0" r="10463" b="0"/>
           <a:stretch xmlns:a="http://schemas.openxmlformats.org/drawingml/2006/main">
             <a:fillRect l="0" t="0" r="0" b="0"/>
@@ -15057,7 +15093,7 @@
           <p:nvPr/>
         </p:nvPicPr>
         <p:blipFill>
-          <a:blip xmlns:r="http://schemas.openxmlformats.org/officeDocument/2006/relationships" xmlns:a="http://schemas.openxmlformats.org/drawingml/2006/main" r:embed="Rcee57b94ec4e4312"/>
+          <a:blip xmlns:r="http://schemas.openxmlformats.org/officeDocument/2006/relationships" xmlns:a="http://schemas.openxmlformats.org/drawingml/2006/main" r:embed="Ra7823cf9f49c47b5"/>
           <a:srcRect xmlns:a="http://schemas.openxmlformats.org/drawingml/2006/main" l="0" t="2825" r="0" b="2825"/>
           <a:stretch xmlns:a="http://schemas.openxmlformats.org/drawingml/2006/main">
             <a:fillRect l="0" t="0" r="0" b="0"/>
@@ -15084,7 +15120,7 @@
           <p:nvPr/>
         </p:nvPicPr>
         <p:blipFill>
-          <a:blip xmlns:r="http://schemas.openxmlformats.org/officeDocument/2006/relationships" xmlns:a="http://schemas.openxmlformats.org/drawingml/2006/main" r:embed="Rf392106c6a0f436a"/>
+          <a:blip xmlns:r="http://schemas.openxmlformats.org/officeDocument/2006/relationships" xmlns:a="http://schemas.openxmlformats.org/drawingml/2006/main" r:embed="R398326348808404d"/>
           <a:srcRect xmlns:a="http://schemas.openxmlformats.org/drawingml/2006/main" l="0" t="5246" r="0" b="5246"/>
           <a:stretch xmlns:a="http://schemas.openxmlformats.org/drawingml/2006/main">
             <a:fillRect l="0" t="0" r="0" b="0"/>

--- a/outputs/Muhammad_Ali_Akbar_Al-Qahri_Portfolio_Minimal.pptx
+++ b/outputs/Muhammad_Ali_Akbar_Al-Qahri_Portfolio_Minimal.pptx
@@ -2,23 +2,23 @@
 <file path=ppt/presentation.xml><?xml version="1.0" encoding="utf-8"?>
 <p:presentation xmlns:p="http://schemas.openxmlformats.org/presentationml/2006/main">
   <p:sldMasterIdLst>
-    <p:sldMasterId xmlns:r="http://schemas.openxmlformats.org/officeDocument/2006/relationships" id="2147483648" r:id="R4594aa119f4a4ddd"/>
+    <p:sldMasterId xmlns:r="http://schemas.openxmlformats.org/officeDocument/2006/relationships" id="2147483648" r:id="R7d3b0f6fbcac4b2a"/>
   </p:sldMasterIdLst>
   <p:notesMasterIdLst>
-    <p:notesMasterId xmlns:r="http://schemas.openxmlformats.org/officeDocument/2006/relationships" r:id="Rc1ddbbf838ac4a54"/>
+    <p:notesMasterId xmlns:r="http://schemas.openxmlformats.org/officeDocument/2006/relationships" r:id="Re24c82348e144d73"/>
   </p:notesMasterIdLst>
   <p:sldIdLst>
-    <p:sldId xmlns:r="http://schemas.openxmlformats.org/officeDocument/2006/relationships" id="256" r:id="R0e4d6953df9f45d3"/>
-    <p:sldId xmlns:r="http://schemas.openxmlformats.org/officeDocument/2006/relationships" id="257" r:id="Ra1a41c12b5dd485f"/>
-    <p:sldId xmlns:r="http://schemas.openxmlformats.org/officeDocument/2006/relationships" id="258" r:id="R4503303dd79a4e6b"/>
-    <p:sldId xmlns:r="http://schemas.openxmlformats.org/officeDocument/2006/relationships" id="259" r:id="R4008bb91d60f4f00"/>
-    <p:sldId xmlns:r="http://schemas.openxmlformats.org/officeDocument/2006/relationships" id="260" r:id="R7132632c76d64cd6"/>
-    <p:sldId xmlns:r="http://schemas.openxmlformats.org/officeDocument/2006/relationships" id="261" r:id="R23942c1de6f34766"/>
-    <p:sldId xmlns:r="http://schemas.openxmlformats.org/officeDocument/2006/relationships" id="262" r:id="R0011c5c75a964dca"/>
-    <p:sldId xmlns:r="http://schemas.openxmlformats.org/officeDocument/2006/relationships" id="263" r:id="R9339e0cb7bfb47fd"/>
-    <p:sldId xmlns:r="http://schemas.openxmlformats.org/officeDocument/2006/relationships" id="264" r:id="R81b9f459ce8941b1"/>
-    <p:sldId xmlns:r="http://schemas.openxmlformats.org/officeDocument/2006/relationships" id="265" r:id="R41e18a73bdd643a2"/>
-    <p:sldId xmlns:r="http://schemas.openxmlformats.org/officeDocument/2006/relationships" id="266" r:id="R0322b827ca6d4bb7"/>
+    <p:sldId xmlns:r="http://schemas.openxmlformats.org/officeDocument/2006/relationships" id="256" r:id="R294b713c0a8c4ee4"/>
+    <p:sldId xmlns:r="http://schemas.openxmlformats.org/officeDocument/2006/relationships" id="257" r:id="R3672848bb7ff460d"/>
+    <p:sldId xmlns:r="http://schemas.openxmlformats.org/officeDocument/2006/relationships" id="258" r:id="R2781ff109b3b4dfb"/>
+    <p:sldId xmlns:r="http://schemas.openxmlformats.org/officeDocument/2006/relationships" id="259" r:id="R59c719752b3545f3"/>
+    <p:sldId xmlns:r="http://schemas.openxmlformats.org/officeDocument/2006/relationships" id="260" r:id="R53f432d2963f4b26"/>
+    <p:sldId xmlns:r="http://schemas.openxmlformats.org/officeDocument/2006/relationships" id="261" r:id="Rf3395d43bc2743f8"/>
+    <p:sldId xmlns:r="http://schemas.openxmlformats.org/officeDocument/2006/relationships" id="262" r:id="R38163c22ceae4b05"/>
+    <p:sldId xmlns:r="http://schemas.openxmlformats.org/officeDocument/2006/relationships" id="263" r:id="R3e7daea75ea3457f"/>
+    <p:sldId xmlns:r="http://schemas.openxmlformats.org/officeDocument/2006/relationships" id="264" r:id="Red22d6940c1b4b92"/>
+    <p:sldId xmlns:r="http://schemas.openxmlformats.org/officeDocument/2006/relationships" id="265" r:id="Ra8431b082b08415f"/>
+    <p:sldId xmlns:r="http://schemas.openxmlformats.org/officeDocument/2006/relationships" id="266" r:id="Re1873ac2db11483e"/>
   </p:sldIdLst>
   <p:sldSz cx="12192000" cy="6858000"/>
   <p:notesSz cx="6858000" cy="9144000"/>
@@ -1271,7 +1271,7 @@
   </p:cSld>
   <p:clrMap bg1="lt1" tx1="dk1" bg2="lt2" tx2="dk2" accent1="accent1" accent2="accent2" accent3="accent3" accent4="accent4" accent5="accent5" accent6="accent6" hlink="hlink" folHlink="folHlink"/>
   <p:sldLayoutIdLst>
-    <p:sldLayoutId xmlns:r="http://schemas.openxmlformats.org/officeDocument/2006/relationships" id="2147483649" r:id="R35b10662b836423f"/>
+    <p:sldLayoutId xmlns:r="http://schemas.openxmlformats.org/officeDocument/2006/relationships" id="2147483649" r:id="R0413e6971f7e4c2d"/>
   </p:sldLayoutIdLst>
   <p:txStyles>
     <p:titleStyle>
@@ -2840,7 +2840,7 @@
                 <a:latin typeface="Aptos"/>
                 <a:ea typeface="Aptos"/>
                 <a:cs typeface="Aptos"/>
-                <a:hlinkClick xmlns:r="http://schemas.openxmlformats.org/officeDocument/2006/relationships" r:id="Rfbbd9c0798314df0"/>
+                <a:hlinkClick xmlns:r="http://schemas.openxmlformats.org/officeDocument/2006/relationships" r:id="R5b8af0cefa6b42ce"/>
               </a:rPr>
               <a:t>OPEN THE COMPLETE WEB PORTFOLIO</a:t>
             </a:r>
@@ -2861,7 +2861,7 @@
                 <a:latin typeface="Consolas"/>
                 <a:ea typeface="Consolas"/>
                 <a:cs typeface="Consolas"/>
-                <a:hlinkClick xmlns:r="http://schemas.openxmlformats.org/officeDocument/2006/relationships" r:id="Rda34b9b42acf4faf"/>
+                <a:hlinkClick xmlns:r="http://schemas.openxmlformats.org/officeDocument/2006/relationships" r:id="Reb50d0bfd4dc4d47"/>
               </a:rPr>
               <a:t>akbaralqahri.github.io/portofolio</a:t>
             </a:r>
@@ -3084,7 +3084,7 @@
           <p:nvPr/>
         </p:nvPicPr>
         <p:blipFill>
-          <a:blip xmlns:r="http://schemas.openxmlformats.org/officeDocument/2006/relationships" xmlns:a="http://schemas.openxmlformats.org/drawingml/2006/main" r:embed="R62a4c4d1a6544ecf"/>
+          <a:blip xmlns:r="http://schemas.openxmlformats.org/officeDocument/2006/relationships" xmlns:a="http://schemas.openxmlformats.org/drawingml/2006/main" r:embed="R3a40220680f040a5"/>
           <a:srcRect xmlns:a="http://schemas.openxmlformats.org/drawingml/2006/main" l="0" t="28690" r="0" b="28690"/>
           <a:stretch xmlns:a="http://schemas.openxmlformats.org/drawingml/2006/main">
             <a:fillRect l="0" t="0" r="0" b="0"/>
@@ -3312,7 +3312,7 @@
                 <a:ea typeface="Consolas"/>
                 <a:cs typeface="Consolas"/>
               </a:rPr>
-              <a:t>INTERNAL DATA PRODUCTS</a:t>
+              <a:t>INTERNAL AUTOMATION</a:t>
             </a:r>
           </a:p>
         </p:txBody>
@@ -3366,7 +3366,7 @@
                 <a:ea typeface="Aptos"/>
                 <a:cs typeface="Aptos"/>
               </a:rPr>
-              <a:t>Internal dashboards turn spreadsheet data into operational visibility.</a:t>
+              <a:t>Internal data products reduce manual operational work.</a:t>
             </a:r>
           </a:p>
         </p:txBody>
@@ -3716,7 +3716,7 @@
                 <a:ea typeface="Aptos"/>
                 <a:cs typeface="Aptos"/>
               </a:rPr>
-              <a:t>Teacher Quota</a:t>
+              <a:t>QC Agent</a:t>
             </a:r>
           </a:p>
         </p:txBody>
@@ -3770,7 +3770,7 @@
                 <a:ea typeface="Aptos"/>
                 <a:cs typeface="Aptos"/>
               </a:rPr>
-              <a:t>Capacity monitoring</a:t>
+              <a:t>Answer-key retrieval</a:t>
             </a:r>
           </a:p>
           <a:p xmlns:a="http://schemas.openxmlformats.org/drawingml/2006/main">
@@ -3794,7 +3794,7 @@
                 <a:ea typeface="Aptos"/>
                 <a:cs typeface="Aptos"/>
               </a:rPr>
-              <a:t>Quota allocation</a:t>
+              <a:t>Automated prepublish QC</a:t>
             </a:r>
           </a:p>
           <a:p xmlns:a="http://schemas.openxmlformats.org/drawingml/2006/main">
@@ -3818,7 +3818,7 @@
                 <a:ea typeface="Aptos"/>
                 <a:cs typeface="Aptos"/>
               </a:rPr>
-              <a:t>Fee tracking</a:t>
+              <a:t>Checkpointed reporting</a:t>
             </a:r>
           </a:p>
         </p:txBody>
@@ -3942,7 +3942,7 @@
                 <a:ea typeface="Aptos"/>
                 <a:cs typeface="Aptos"/>
               </a:rPr>
-              <a:t>Event Momentum</a:t>
+              <a:t>Momentum &amp; Quota</a:t>
             </a:r>
           </a:p>
         </p:txBody>
@@ -3996,7 +3996,7 @@
                 <a:ea typeface="Aptos"/>
                 <a:cs typeface="Aptos"/>
               </a:rPr>
-              <a:t>Registration windows</a:t>
+              <a:t>Teacher capacity</a:t>
             </a:r>
           </a:p>
           <a:p xmlns:a="http://schemas.openxmlformats.org/drawingml/2006/main">
@@ -4020,7 +4020,7 @@
                 <a:ea typeface="Aptos"/>
                 <a:cs typeface="Aptos"/>
               </a:rPr>
-              <a:t>Event timeline</a:t>
+              <a:t>Event schedules</a:t>
             </a:r>
           </a:p>
           <a:p xmlns:a="http://schemas.openxmlformats.org/drawingml/2006/main">
@@ -4044,7 +4044,7 @@
                 <a:ea typeface="Aptos"/>
                 <a:cs typeface="Aptos"/>
               </a:rPr>
-              <a:t>Status monitoring</a:t>
+              <a:t>Allocation visibility</a:t>
             </a:r>
           </a:p>
         </p:txBody>
@@ -4413,7 +4413,7 @@
                 <a:ea typeface="Aptos"/>
                 <a:cs typeface="Aptos"/>
               </a:rPr>
-              <a:t>Google Sheets database · Apps Script · safe synthetic previews</a:t>
+              <a:t>Google Sheets &amp; Apps Script dashboards · Node.js, Playwright &amp; SQLite QC automation · safe synthetic previews</a:t>
             </a:r>
           </a:p>
         </p:txBody>
@@ -5060,7 +5060,7 @@
                 <a:latin typeface="Aptos"/>
                 <a:ea typeface="Aptos"/>
                 <a:cs typeface="Aptos"/>
-                <a:hlinkClick xmlns:r="http://schemas.openxmlformats.org/officeDocument/2006/relationships" r:id="R233e3b9576d24db1"/>
+                <a:hlinkClick xmlns:r="http://schemas.openxmlformats.org/officeDocument/2006/relationships" r:id="Re3770eff3d9c49e7"/>
               </a:rPr>
               <a:t>OPEN THE WEB PORTFOLIO</a:t>
             </a:r>
@@ -5081,7 +5081,7 @@
                 <a:latin typeface="Consolas"/>
                 <a:ea typeface="Consolas"/>
                 <a:cs typeface="Consolas"/>
-                <a:hlinkClick xmlns:r="http://schemas.openxmlformats.org/officeDocument/2006/relationships" r:id="Rc54eaf3d1c6f4cb6"/>
+                <a:hlinkClick xmlns:r="http://schemas.openxmlformats.org/officeDocument/2006/relationships" r:id="R3c9c606541b748a4"/>
               </a:rPr>
               <a:t>akbaralqahri.github.io/portofolio</a:t>
             </a:r>
@@ -5453,7 +5453,7 @@
                 <a:latin typeface="Aptos"/>
                 <a:ea typeface="Aptos"/>
                 <a:cs typeface="Aptos"/>
-                <a:hlinkClick xmlns:r="http://schemas.openxmlformats.org/officeDocument/2006/relationships" r:id="Rd8e66261b1504020"/>
+                <a:hlinkClick xmlns:r="http://schemas.openxmlformats.org/officeDocument/2006/relationships" r:id="Raca5e9e3d9214aef"/>
               </a:rPr>
               <a:t>LINKEDIN · linkedin.com/in/akbaralqahri</a:t>
             </a:r>
@@ -5474,7 +5474,7 @@
                 <a:latin typeface="Aptos"/>
                 <a:ea typeface="Aptos"/>
                 <a:cs typeface="Aptos"/>
-                <a:hlinkClick xmlns:r="http://schemas.openxmlformats.org/officeDocument/2006/relationships" r:id="R0dd2d9736e0c4e1f"/>
+                <a:hlinkClick xmlns:r="http://schemas.openxmlformats.org/officeDocument/2006/relationships" r:id="Rcb8fefd8aabb4694"/>
               </a:rPr>
               <a:t>WEB PORTFOLIO · akbaralqahri.github.io/portofolio</a:t>
             </a:r>
@@ -5598,7 +5598,7 @@
           <p:nvPr/>
         </p:nvPicPr>
         <p:blipFill>
-          <a:blip xmlns:r="http://schemas.openxmlformats.org/officeDocument/2006/relationships" xmlns:a="http://schemas.openxmlformats.org/drawingml/2006/main" r:embed="R7510773e6fc644c1"/>
+          <a:blip xmlns:r="http://schemas.openxmlformats.org/officeDocument/2006/relationships" xmlns:a="http://schemas.openxmlformats.org/drawingml/2006/main" r:embed="R4fbc793f0bf947ad"/>
           <a:srcRect xmlns:a="http://schemas.openxmlformats.org/drawingml/2006/main" l="0" t="5980" r="0" b="5980"/>
           <a:stretch xmlns:a="http://schemas.openxmlformats.org/drawingml/2006/main">
             <a:fillRect l="0" t="0" r="0" b="0"/>
@@ -10192,7 +10192,7 @@
                 <a:ea typeface="Consolas"/>
                 <a:cs typeface="Consolas"/>
               </a:rPr>
-              <a:t>FLAGSHIP PRODUCT</a:t>
+              <a:t>GEOSPATIAL INTELLIGENCE</a:t>
             </a:r>
           </a:p>
         </p:txBody>
@@ -10246,7 +10246,7 @@
                 <a:ea typeface="Aptos"/>
                 <a:cs typeface="Aptos"/>
               </a:rPr>
-              <a:t>PDDIKTI turns fragmented education data into a national map.</a:t>
+              <a:t>Two national maps turn fragmented records into inspectable coverage.</a:t>
             </a:r>
           </a:p>
         </p:txBody>
@@ -10300,7 +10300,7 @@
                 <a:ea typeface="Aptos"/>
                 <a:cs typeface="Aptos"/>
               </a:rPr>
-              <a:t>A public exploration product for comparing higher-education coverage across provinces and cities-supported by explicit data-quality checks.</a:t>
+              <a:t>PDDIKTI maps higher-education coverage; SPPG Insight reveals service distribution, demand-gap proxies, and data readiness across Indonesia.</a:t>
             </a:r>
           </a:p>
         </p:txBody>
@@ -10389,7 +10389,7 @@
                 <a:ea typeface="Aptos"/>
                 <a:cs typeface="Aptos"/>
               </a:rPr>
-              <a:t>DEPLOYED WEB APP</a:t>
+              <a:t>2 DEPLOYED APPS</a:t>
             </a:r>
           </a:p>
         </p:txBody>
@@ -10443,7 +10443,7 @@
                 <a:ea typeface="Aptos"/>
                 <a:cs typeface="Aptos"/>
               </a:rPr>
-              <a:t>5,433</a:t>
+              <a:t>2</a:t>
             </a:r>
           </a:p>
         </p:txBody>
@@ -10497,7 +10497,7 @@
                 <a:ea typeface="Aptos"/>
                 <a:cs typeface="Aptos"/>
               </a:rPr>
-              <a:t>institutions</a:t>
+              <a:t>live geo portals</a:t>
             </a:r>
           </a:p>
         </p:txBody>
@@ -10581,7 +10581,7 @@
         </p:spPr>
         <p:txBody>
           <a:bodyPr xmlns:a="http://schemas.openxmlformats.org/drawingml/2006/main" wrap="square" lIns="0" tIns="0" rIns="0" bIns="0" anchor="t">
-            <a:normAutofit fontScale="100000"/>
+            <a:normAutofit fontScale="79747"/>
           </a:bodyPr>
           <a:lstStyle xmlns:a="http://schemas.openxmlformats.org/drawingml/2006/main"/>
           <a:p xmlns:a="http://schemas.openxmlformats.org/drawingml/2006/main">
@@ -10605,7 +10605,7 @@
                 <a:ea typeface="Aptos"/>
                 <a:cs typeface="Aptos"/>
               </a:rPr>
-              <a:t>provinces</a:t>
+              <a:t>provinces covered</a:t>
             </a:r>
           </a:p>
         </p:txBody>
@@ -10659,7 +10659,7 @@
                 <a:ea typeface="Aptos"/>
                 <a:cs typeface="Aptos"/>
               </a:rPr>
-              <a:t>34</a:t>
+              <a:t>QA</a:t>
             </a:r>
           </a:p>
         </p:txBody>
@@ -10713,7 +10713,7 @@
                 <a:ea typeface="Aptos"/>
                 <a:cs typeface="Aptos"/>
               </a:rPr>
-              <a:t>quality checks</a:t>
+              <a:t>data readiness</a:t>
             </a:r>
           </a:p>
         </p:txBody>
@@ -10801,8 +10801,9 @@
                 <a:latin typeface="Aptos"/>
                 <a:ea typeface="Aptos"/>
                 <a:cs typeface="Aptos"/>
-              </a:rPr>
-              <a:t>perguruan-tinggi-indonesia-nu.vercel.app</a:t>
+                <a:hlinkClick xmlns:r="http://schemas.openxmlformats.org/officeDocument/2006/relationships" r:id="Rbdeb064401cd485b"/>
+              </a:rPr>
+              <a:t>sppg-geo-uwf4.vercel.app</a:t>
             </a:r>
           </a:p>
         </p:txBody>
@@ -11023,8 +11024,8 @@
           <p:nvPr/>
         </p:nvPicPr>
         <p:blipFill>
-          <a:blip xmlns:r="http://schemas.openxmlformats.org/officeDocument/2006/relationships" xmlns:a="http://schemas.openxmlformats.org/drawingml/2006/main" r:embed="R0f2c9b8df90d4734"/>
-          <a:srcRect xmlns:a="http://schemas.openxmlformats.org/drawingml/2006/main" l="0" t="874" r="0" b="874"/>
+          <a:blip xmlns:r="http://schemas.openxmlformats.org/officeDocument/2006/relationships" xmlns:a="http://schemas.openxmlformats.org/drawingml/2006/main" r:embed="R47e16e90e39f4bab"/>
+          <a:srcRect xmlns:a="http://schemas.openxmlformats.org/drawingml/2006/main" l="0" t="870" r="0" b="870"/>
           <a:stretch xmlns:a="http://schemas.openxmlformats.org/drawingml/2006/main">
             <a:fillRect l="0" t="0" r="0" b="0"/>
           </a:stretch>
@@ -11990,7 +11991,7 @@
           <p:nvPr/>
         </p:nvPicPr>
         <p:blipFill>
-          <a:blip xmlns:r="http://schemas.openxmlformats.org/officeDocument/2006/relationships" xmlns:a="http://schemas.openxmlformats.org/drawingml/2006/main" r:embed="R52866994abab479c"/>
+          <a:blip xmlns:r="http://schemas.openxmlformats.org/officeDocument/2006/relationships" xmlns:a="http://schemas.openxmlformats.org/drawingml/2006/main" r:embed="R3885ae92c80740b7"/>
           <a:srcRect xmlns:a="http://schemas.openxmlformats.org/drawingml/2006/main" l="0" t="5719" r="0" b="5719"/>
           <a:stretch xmlns:a="http://schemas.openxmlformats.org/drawingml/2006/main">
             <a:fillRect l="0" t="0" r="0" b="0"/>
@@ -12017,7 +12018,7 @@
           <p:nvPr/>
         </p:nvPicPr>
         <p:blipFill>
-          <a:blip xmlns:r="http://schemas.openxmlformats.org/officeDocument/2006/relationships" xmlns:a="http://schemas.openxmlformats.org/drawingml/2006/main" r:embed="R433b47aeeff34aaa"/>
+          <a:blip xmlns:r="http://schemas.openxmlformats.org/officeDocument/2006/relationships" xmlns:a="http://schemas.openxmlformats.org/drawingml/2006/main" r:embed="R586d48db37304cba"/>
           <a:srcRect xmlns:a="http://schemas.openxmlformats.org/drawingml/2006/main" l="0" t="5719" r="0" b="5719"/>
           <a:stretch xmlns:a="http://schemas.openxmlformats.org/drawingml/2006/main">
             <a:fillRect l="0" t="0" r="0" b="0"/>
@@ -13016,7 +13017,7 @@
           <p:nvPr/>
         </p:nvPicPr>
         <p:blipFill>
-          <a:blip xmlns:r="http://schemas.openxmlformats.org/officeDocument/2006/relationships" xmlns:a="http://schemas.openxmlformats.org/drawingml/2006/main" r:embed="Rf95911cb68e34420"/>
+          <a:blip xmlns:r="http://schemas.openxmlformats.org/officeDocument/2006/relationships" xmlns:a="http://schemas.openxmlformats.org/drawingml/2006/main" r:embed="Rda5c997ece0442a9"/>
           <a:stretch xmlns:a="http://schemas.openxmlformats.org/drawingml/2006/main"/>
         </p:blipFill>
         <p:spPr>
@@ -13040,7 +13041,7 @@
           <p:nvPr/>
         </p:nvPicPr>
         <p:blipFill>
-          <a:blip xmlns:r="http://schemas.openxmlformats.org/officeDocument/2006/relationships" xmlns:a="http://schemas.openxmlformats.org/drawingml/2006/main" r:embed="Rad630dfb40784425"/>
+          <a:blip xmlns:r="http://schemas.openxmlformats.org/officeDocument/2006/relationships" xmlns:a="http://schemas.openxmlformats.org/drawingml/2006/main" r:embed="Rbc86a936547647ef"/>
           <a:stretch xmlns:a="http://schemas.openxmlformats.org/drawingml/2006/main"/>
         </p:blipFill>
         <p:spPr>
@@ -14082,7 +14083,7 @@
           <p:nvPr/>
         </p:nvPicPr>
         <p:blipFill>
-          <a:blip xmlns:r="http://schemas.openxmlformats.org/officeDocument/2006/relationships" xmlns:a="http://schemas.openxmlformats.org/drawingml/2006/main" r:embed="Rc9ab358b9ba24a8f"/>
+          <a:blip xmlns:r="http://schemas.openxmlformats.org/officeDocument/2006/relationships" xmlns:a="http://schemas.openxmlformats.org/drawingml/2006/main" r:embed="Re377b477ee134235"/>
           <a:srcRect xmlns:a="http://schemas.openxmlformats.org/drawingml/2006/main" l="0" t="4261" r="0" b="4261"/>
           <a:stretch xmlns:a="http://schemas.openxmlformats.org/drawingml/2006/main">
             <a:fillRect l="0" t="0" r="0" b="0"/>
@@ -15068,7 +15069,7 @@
           <p:nvPr/>
         </p:nvPicPr>
         <p:blipFill>
-          <a:blip xmlns:r="http://schemas.openxmlformats.org/officeDocument/2006/relationships" xmlns:a="http://schemas.openxmlformats.org/drawingml/2006/main" r:embed="Rbfec85385b1649f9"/>
+          <a:blip xmlns:r="http://schemas.openxmlformats.org/officeDocument/2006/relationships" xmlns:a="http://schemas.openxmlformats.org/drawingml/2006/main" r:embed="R3e399db0ab404bdd"/>
           <a:srcRect xmlns:a="http://schemas.openxmlformats.org/drawingml/2006/main" l="10463" t="0" r="10463" b="0"/>
           <a:stretch xmlns:a="http://schemas.openxmlformats.org/drawingml/2006/main">
             <a:fillRect l="0" t="0" r="0" b="0"/>
@@ -15093,7 +15094,7 @@
           <p:nvPr/>
         </p:nvPicPr>
         <p:blipFill>
-          <a:blip xmlns:r="http://schemas.openxmlformats.org/officeDocument/2006/relationships" xmlns:a="http://schemas.openxmlformats.org/drawingml/2006/main" r:embed="Ra7823cf9f49c47b5"/>
+          <a:blip xmlns:r="http://schemas.openxmlformats.org/officeDocument/2006/relationships" xmlns:a="http://schemas.openxmlformats.org/drawingml/2006/main" r:embed="R154ebccf9a9e4fd4"/>
           <a:srcRect xmlns:a="http://schemas.openxmlformats.org/drawingml/2006/main" l="0" t="2825" r="0" b="2825"/>
           <a:stretch xmlns:a="http://schemas.openxmlformats.org/drawingml/2006/main">
             <a:fillRect l="0" t="0" r="0" b="0"/>
@@ -15120,7 +15121,7 @@
           <p:nvPr/>
         </p:nvPicPr>
         <p:blipFill>
-          <a:blip xmlns:r="http://schemas.openxmlformats.org/officeDocument/2006/relationships" xmlns:a="http://schemas.openxmlformats.org/drawingml/2006/main" r:embed="R398326348808404d"/>
+          <a:blip xmlns:r="http://schemas.openxmlformats.org/officeDocument/2006/relationships" xmlns:a="http://schemas.openxmlformats.org/drawingml/2006/main" r:embed="Rad1acabb585a4289"/>
           <a:srcRect xmlns:a="http://schemas.openxmlformats.org/drawingml/2006/main" l="0" t="5246" r="0" b="5246"/>
           <a:stretch xmlns:a="http://schemas.openxmlformats.org/drawingml/2006/main">
             <a:fillRect l="0" t="0" r="0" b="0"/>

--- a/outputs/Muhammad_Ali_Akbar_Al-Qahri_Portfolio_Minimal.pptx
+++ b/outputs/Muhammad_Ali_Akbar_Al-Qahri_Portfolio_Minimal.pptx
@@ -2,23 +2,23 @@
 <file path=ppt/presentation.xml><?xml version="1.0" encoding="utf-8"?>
 <p:presentation xmlns:p="http://schemas.openxmlformats.org/presentationml/2006/main">
   <p:sldMasterIdLst>
-    <p:sldMasterId xmlns:r="http://schemas.openxmlformats.org/officeDocument/2006/relationships" id="2147483648" r:id="R7d3b0f6fbcac4b2a"/>
+    <p:sldMasterId xmlns:r="http://schemas.openxmlformats.org/officeDocument/2006/relationships" id="2147483648" r:id="Rdcc13abbc4254258"/>
   </p:sldMasterIdLst>
   <p:notesMasterIdLst>
-    <p:notesMasterId xmlns:r="http://schemas.openxmlformats.org/officeDocument/2006/relationships" r:id="Re24c82348e144d73"/>
+    <p:notesMasterId xmlns:r="http://schemas.openxmlformats.org/officeDocument/2006/relationships" r:id="R6619fad3fce84f83"/>
   </p:notesMasterIdLst>
   <p:sldIdLst>
-    <p:sldId xmlns:r="http://schemas.openxmlformats.org/officeDocument/2006/relationships" id="256" r:id="R294b713c0a8c4ee4"/>
-    <p:sldId xmlns:r="http://schemas.openxmlformats.org/officeDocument/2006/relationships" id="257" r:id="R3672848bb7ff460d"/>
-    <p:sldId xmlns:r="http://schemas.openxmlformats.org/officeDocument/2006/relationships" id="258" r:id="R2781ff109b3b4dfb"/>
-    <p:sldId xmlns:r="http://schemas.openxmlformats.org/officeDocument/2006/relationships" id="259" r:id="R59c719752b3545f3"/>
-    <p:sldId xmlns:r="http://schemas.openxmlformats.org/officeDocument/2006/relationships" id="260" r:id="R53f432d2963f4b26"/>
-    <p:sldId xmlns:r="http://schemas.openxmlformats.org/officeDocument/2006/relationships" id="261" r:id="Rf3395d43bc2743f8"/>
-    <p:sldId xmlns:r="http://schemas.openxmlformats.org/officeDocument/2006/relationships" id="262" r:id="R38163c22ceae4b05"/>
-    <p:sldId xmlns:r="http://schemas.openxmlformats.org/officeDocument/2006/relationships" id="263" r:id="R3e7daea75ea3457f"/>
-    <p:sldId xmlns:r="http://schemas.openxmlformats.org/officeDocument/2006/relationships" id="264" r:id="Red22d6940c1b4b92"/>
-    <p:sldId xmlns:r="http://schemas.openxmlformats.org/officeDocument/2006/relationships" id="265" r:id="Ra8431b082b08415f"/>
-    <p:sldId xmlns:r="http://schemas.openxmlformats.org/officeDocument/2006/relationships" id="266" r:id="Re1873ac2db11483e"/>
+    <p:sldId xmlns:r="http://schemas.openxmlformats.org/officeDocument/2006/relationships" id="256" r:id="R347feb2bf53d453c"/>
+    <p:sldId xmlns:r="http://schemas.openxmlformats.org/officeDocument/2006/relationships" id="257" r:id="R7ea1ab817bc3453f"/>
+    <p:sldId xmlns:r="http://schemas.openxmlformats.org/officeDocument/2006/relationships" id="258" r:id="R925fcf9e2ba7419d"/>
+    <p:sldId xmlns:r="http://schemas.openxmlformats.org/officeDocument/2006/relationships" id="259" r:id="R0f2f2faacc484070"/>
+    <p:sldId xmlns:r="http://schemas.openxmlformats.org/officeDocument/2006/relationships" id="260" r:id="Rab1ce1976bab4fcd"/>
+    <p:sldId xmlns:r="http://schemas.openxmlformats.org/officeDocument/2006/relationships" id="261" r:id="R330645ab13114cad"/>
+    <p:sldId xmlns:r="http://schemas.openxmlformats.org/officeDocument/2006/relationships" id="262" r:id="Rd9e622a42d5049d3"/>
+    <p:sldId xmlns:r="http://schemas.openxmlformats.org/officeDocument/2006/relationships" id="263" r:id="Rba4526a53de747cd"/>
+    <p:sldId xmlns:r="http://schemas.openxmlformats.org/officeDocument/2006/relationships" id="264" r:id="Rdedb8c3895b043aa"/>
+    <p:sldId xmlns:r="http://schemas.openxmlformats.org/officeDocument/2006/relationships" id="265" r:id="R057db855ff6d4712"/>
+    <p:sldId xmlns:r="http://schemas.openxmlformats.org/officeDocument/2006/relationships" id="266" r:id="R4beb1c60706248ca"/>
   </p:sldIdLst>
   <p:sldSz cx="12192000" cy="6858000"/>
   <p:notesSz cx="6858000" cy="9144000"/>
@@ -1271,7 +1271,7 @@
   </p:cSld>
   <p:clrMap bg1="lt1" tx1="dk1" bg2="lt2" tx2="dk2" accent1="accent1" accent2="accent2" accent3="accent3" accent4="accent4" accent5="accent5" accent6="accent6" hlink="hlink" folHlink="folHlink"/>
   <p:sldLayoutIdLst>
-    <p:sldLayoutId xmlns:r="http://schemas.openxmlformats.org/officeDocument/2006/relationships" id="2147483649" r:id="R0413e6971f7e4c2d"/>
+    <p:sldLayoutId xmlns:r="http://schemas.openxmlformats.org/officeDocument/2006/relationships" id="2147483649" r:id="R88b579e820b144e6"/>
   </p:sldLayoutIdLst>
   <p:txStyles>
     <p:titleStyle>
@@ -2840,7 +2840,7 @@
                 <a:latin typeface="Aptos"/>
                 <a:ea typeface="Aptos"/>
                 <a:cs typeface="Aptos"/>
-                <a:hlinkClick xmlns:r="http://schemas.openxmlformats.org/officeDocument/2006/relationships" r:id="R5b8af0cefa6b42ce"/>
+                <a:hlinkClick xmlns:r="http://schemas.openxmlformats.org/officeDocument/2006/relationships" r:id="R8bfcc0f9918842fc"/>
               </a:rPr>
               <a:t>OPEN THE COMPLETE WEB PORTFOLIO</a:t>
             </a:r>
@@ -2861,7 +2861,7 @@
                 <a:latin typeface="Consolas"/>
                 <a:ea typeface="Consolas"/>
                 <a:cs typeface="Consolas"/>
-                <a:hlinkClick xmlns:r="http://schemas.openxmlformats.org/officeDocument/2006/relationships" r:id="Reb50d0bfd4dc4d47"/>
+                <a:hlinkClick xmlns:r="http://schemas.openxmlformats.org/officeDocument/2006/relationships" r:id="Rb4e843b81f124b38"/>
               </a:rPr>
               <a:t>akbaralqahri.github.io/portofolio</a:t>
             </a:r>
@@ -3084,7 +3084,7 @@
           <p:nvPr/>
         </p:nvPicPr>
         <p:blipFill>
-          <a:blip xmlns:r="http://schemas.openxmlformats.org/officeDocument/2006/relationships" xmlns:a="http://schemas.openxmlformats.org/drawingml/2006/main" r:embed="R3a40220680f040a5"/>
+          <a:blip xmlns:r="http://schemas.openxmlformats.org/officeDocument/2006/relationships" xmlns:a="http://schemas.openxmlformats.org/drawingml/2006/main" r:embed="R68c521ce6abf4c57"/>
           <a:srcRect xmlns:a="http://schemas.openxmlformats.org/drawingml/2006/main" l="0" t="28690" r="0" b="28690"/>
           <a:stretch xmlns:a="http://schemas.openxmlformats.org/drawingml/2006/main">
             <a:fillRect l="0" t="0" r="0" b="0"/>
@@ -5060,7 +5060,7 @@
                 <a:latin typeface="Aptos"/>
                 <a:ea typeface="Aptos"/>
                 <a:cs typeface="Aptos"/>
-                <a:hlinkClick xmlns:r="http://schemas.openxmlformats.org/officeDocument/2006/relationships" r:id="Re3770eff3d9c49e7"/>
+                <a:hlinkClick xmlns:r="http://schemas.openxmlformats.org/officeDocument/2006/relationships" r:id="Rb028d1914756444b"/>
               </a:rPr>
               <a:t>OPEN THE WEB PORTFOLIO</a:t>
             </a:r>
@@ -5081,7 +5081,7 @@
                 <a:latin typeface="Consolas"/>
                 <a:ea typeface="Consolas"/>
                 <a:cs typeface="Consolas"/>
-                <a:hlinkClick xmlns:r="http://schemas.openxmlformats.org/officeDocument/2006/relationships" r:id="R3c9c606541b748a4"/>
+                <a:hlinkClick xmlns:r="http://schemas.openxmlformats.org/officeDocument/2006/relationships" r:id="R39cff000f5c241fa"/>
               </a:rPr>
               <a:t>akbaralqahri.github.io/portofolio</a:t>
             </a:r>
@@ -5453,7 +5453,7 @@
                 <a:latin typeface="Aptos"/>
                 <a:ea typeface="Aptos"/>
                 <a:cs typeface="Aptos"/>
-                <a:hlinkClick xmlns:r="http://schemas.openxmlformats.org/officeDocument/2006/relationships" r:id="Raca5e9e3d9214aef"/>
+                <a:hlinkClick xmlns:r="http://schemas.openxmlformats.org/officeDocument/2006/relationships" r:id="Rdea7bef2239645de"/>
               </a:rPr>
               <a:t>LINKEDIN · linkedin.com/in/akbaralqahri</a:t>
             </a:r>
@@ -5474,7 +5474,7 @@
                 <a:latin typeface="Aptos"/>
                 <a:ea typeface="Aptos"/>
                 <a:cs typeface="Aptos"/>
-                <a:hlinkClick xmlns:r="http://schemas.openxmlformats.org/officeDocument/2006/relationships" r:id="Rcb8fefd8aabb4694"/>
+                <a:hlinkClick xmlns:r="http://schemas.openxmlformats.org/officeDocument/2006/relationships" r:id="R84f968eb88df466a"/>
               </a:rPr>
               <a:t>WEB PORTFOLIO · akbaralqahri.github.io/portofolio</a:t>
             </a:r>
@@ -5598,7 +5598,7 @@
           <p:nvPr/>
         </p:nvPicPr>
         <p:blipFill>
-          <a:blip xmlns:r="http://schemas.openxmlformats.org/officeDocument/2006/relationships" xmlns:a="http://schemas.openxmlformats.org/drawingml/2006/main" r:embed="R4fbc793f0bf947ad"/>
+          <a:blip xmlns:r="http://schemas.openxmlformats.org/officeDocument/2006/relationships" xmlns:a="http://schemas.openxmlformats.org/drawingml/2006/main" r:embed="Rb47c392991fa4ff0"/>
           <a:srcRect xmlns:a="http://schemas.openxmlformats.org/drawingml/2006/main" l="0" t="5980" r="0" b="5980"/>
           <a:stretch xmlns:a="http://schemas.openxmlformats.org/drawingml/2006/main">
             <a:fillRect l="0" t="0" r="0" b="0"/>
@@ -10246,7 +10246,7 @@
                 <a:ea typeface="Aptos"/>
                 <a:cs typeface="Aptos"/>
               </a:rPr>
-              <a:t>Two national maps turn fragmented records into inspectable coverage.</a:t>
+              <a:t>Three national maps make regional patterns visible and comparable.</a:t>
             </a:r>
           </a:p>
         </p:txBody>
@@ -10300,7 +10300,7 @@
                 <a:ea typeface="Aptos"/>
                 <a:cs typeface="Aptos"/>
               </a:rPr>
-              <a:t>PDDIKTI maps higher-education coverage; SPPG Insight reveals service distribution, demand-gap proxies, and data readiness across Indonesia.</a:t>
+              <a:t>PDDIKTI maps higher education, SPPG Insight tracks service coverage, and Peta Kemiskinan combines BPS trends, spatial clustering, and forecast diagnostics.</a:t>
             </a:r>
           </a:p>
         </p:txBody>
@@ -10389,7 +10389,7 @@
                 <a:ea typeface="Aptos"/>
                 <a:cs typeface="Aptos"/>
               </a:rPr>
-              <a:t>2 DEPLOYED APPS</a:t>
+              <a:t>3 DEPLOYED APPS</a:t>
             </a:r>
           </a:p>
         </p:txBody>
@@ -10443,7 +10443,7 @@
                 <a:ea typeface="Aptos"/>
                 <a:cs typeface="Aptos"/>
               </a:rPr>
-              <a:t>2</a:t>
+              <a:t>3</a:t>
             </a:r>
           </a:p>
         </p:txBody>
@@ -10659,7 +10659,7 @@
                 <a:ea typeface="Aptos"/>
                 <a:cs typeface="Aptos"/>
               </a:rPr>
-              <a:t>QA</a:t>
+              <a:t>0.353</a:t>
             </a:r>
           </a:p>
         </p:txBody>
@@ -10689,7 +10689,7 @@
         </p:spPr>
         <p:txBody>
           <a:bodyPr xmlns:a="http://schemas.openxmlformats.org/drawingml/2006/main" wrap="square" lIns="0" tIns="0" rIns="0" bIns="0" anchor="t">
-            <a:normAutofit fontScale="100000"/>
+            <a:normAutofit fontScale="95309"/>
           </a:bodyPr>
           <a:lstStyle xmlns:a="http://schemas.openxmlformats.org/drawingml/2006/main"/>
           <a:p xmlns:a="http://schemas.openxmlformats.org/drawingml/2006/main">
@@ -10713,7 +10713,7 @@
                 <a:ea typeface="Aptos"/>
                 <a:cs typeface="Aptos"/>
               </a:rPr>
-              <a:t>data readiness</a:t>
+              <a:t>forecast MAE (pp)</a:t>
             </a:r>
           </a:p>
         </p:txBody>
@@ -10801,9 +10801,9 @@
                 <a:latin typeface="Aptos"/>
                 <a:ea typeface="Aptos"/>
                 <a:cs typeface="Aptos"/>
-                <a:hlinkClick xmlns:r="http://schemas.openxmlformats.org/officeDocument/2006/relationships" r:id="Rbdeb064401cd485b"/>
-              </a:rPr>
-              <a:t>sppg-geo-uwf4.vercel.app</a:t>
+                <a:hlinkClick xmlns:r="http://schemas.openxmlformats.org/officeDocument/2006/relationships" r:id="R280fbd81f0fe4a5e"/>
+              </a:rPr>
+              <a:t>OPEN PETA KEMISKINAN ↗</a:t>
             </a:r>
           </a:p>
         </p:txBody>
@@ -11024,8 +11024,8 @@
           <p:nvPr/>
         </p:nvPicPr>
         <p:blipFill>
-          <a:blip xmlns:r="http://schemas.openxmlformats.org/officeDocument/2006/relationships" xmlns:a="http://schemas.openxmlformats.org/drawingml/2006/main" r:embed="R47e16e90e39f4bab"/>
-          <a:srcRect xmlns:a="http://schemas.openxmlformats.org/drawingml/2006/main" l="0" t="870" r="0" b="870"/>
+          <a:blip xmlns:r="http://schemas.openxmlformats.org/officeDocument/2006/relationships" xmlns:a="http://schemas.openxmlformats.org/drawingml/2006/main" r:embed="R7f059377d6ec42eb"/>
+          <a:srcRect xmlns:a="http://schemas.openxmlformats.org/drawingml/2006/main" l="0" t="16819" r="0" b="16819"/>
           <a:stretch xmlns:a="http://schemas.openxmlformats.org/drawingml/2006/main">
             <a:fillRect l="0" t="0" r="0" b="0"/>
           </a:stretch>
@@ -11991,7 +11991,7 @@
           <p:nvPr/>
         </p:nvPicPr>
         <p:blipFill>
-          <a:blip xmlns:r="http://schemas.openxmlformats.org/officeDocument/2006/relationships" xmlns:a="http://schemas.openxmlformats.org/drawingml/2006/main" r:embed="R3885ae92c80740b7"/>
+          <a:blip xmlns:r="http://schemas.openxmlformats.org/officeDocument/2006/relationships" xmlns:a="http://schemas.openxmlformats.org/drawingml/2006/main" r:embed="R14b2ec6b512b4fb1"/>
           <a:srcRect xmlns:a="http://schemas.openxmlformats.org/drawingml/2006/main" l="0" t="5719" r="0" b="5719"/>
           <a:stretch xmlns:a="http://schemas.openxmlformats.org/drawingml/2006/main">
             <a:fillRect l="0" t="0" r="0" b="0"/>
@@ -12018,7 +12018,7 @@
           <p:nvPr/>
         </p:nvPicPr>
         <p:blipFill>
-          <a:blip xmlns:r="http://schemas.openxmlformats.org/officeDocument/2006/relationships" xmlns:a="http://schemas.openxmlformats.org/drawingml/2006/main" r:embed="R586d48db37304cba"/>
+          <a:blip xmlns:r="http://schemas.openxmlformats.org/officeDocument/2006/relationships" xmlns:a="http://schemas.openxmlformats.org/drawingml/2006/main" r:embed="R64d078c2d1ef40d0"/>
           <a:srcRect xmlns:a="http://schemas.openxmlformats.org/drawingml/2006/main" l="0" t="5719" r="0" b="5719"/>
           <a:stretch xmlns:a="http://schemas.openxmlformats.org/drawingml/2006/main">
             <a:fillRect l="0" t="0" r="0" b="0"/>
@@ -13017,7 +13017,7 @@
           <p:nvPr/>
         </p:nvPicPr>
         <p:blipFill>
-          <a:blip xmlns:r="http://schemas.openxmlformats.org/officeDocument/2006/relationships" xmlns:a="http://schemas.openxmlformats.org/drawingml/2006/main" r:embed="Rda5c997ece0442a9"/>
+          <a:blip xmlns:r="http://schemas.openxmlformats.org/officeDocument/2006/relationships" xmlns:a="http://schemas.openxmlformats.org/drawingml/2006/main" r:embed="Re25a45c6f5eb4f6d"/>
           <a:stretch xmlns:a="http://schemas.openxmlformats.org/drawingml/2006/main"/>
         </p:blipFill>
         <p:spPr>
@@ -13041,7 +13041,7 @@
           <p:nvPr/>
         </p:nvPicPr>
         <p:blipFill>
-          <a:blip xmlns:r="http://schemas.openxmlformats.org/officeDocument/2006/relationships" xmlns:a="http://schemas.openxmlformats.org/drawingml/2006/main" r:embed="Rbc86a936547647ef"/>
+          <a:blip xmlns:r="http://schemas.openxmlformats.org/officeDocument/2006/relationships" xmlns:a="http://schemas.openxmlformats.org/drawingml/2006/main" r:embed="R71945bd7710b43ae"/>
           <a:stretch xmlns:a="http://schemas.openxmlformats.org/drawingml/2006/main"/>
         </p:blipFill>
         <p:spPr>
@@ -14083,7 +14083,7 @@
           <p:nvPr/>
         </p:nvPicPr>
         <p:blipFill>
-          <a:blip xmlns:r="http://schemas.openxmlformats.org/officeDocument/2006/relationships" xmlns:a="http://schemas.openxmlformats.org/drawingml/2006/main" r:embed="Re377b477ee134235"/>
+          <a:blip xmlns:r="http://schemas.openxmlformats.org/officeDocument/2006/relationships" xmlns:a="http://schemas.openxmlformats.org/drawingml/2006/main" r:embed="R178f17ccf9144646"/>
           <a:srcRect xmlns:a="http://schemas.openxmlformats.org/drawingml/2006/main" l="0" t="4261" r="0" b="4261"/>
           <a:stretch xmlns:a="http://schemas.openxmlformats.org/drawingml/2006/main">
             <a:fillRect l="0" t="0" r="0" b="0"/>
@@ -15069,7 +15069,7 @@
           <p:nvPr/>
         </p:nvPicPr>
         <p:blipFill>
-          <a:blip xmlns:r="http://schemas.openxmlformats.org/officeDocument/2006/relationships" xmlns:a="http://schemas.openxmlformats.org/drawingml/2006/main" r:embed="R3e399db0ab404bdd"/>
+          <a:blip xmlns:r="http://schemas.openxmlformats.org/officeDocument/2006/relationships" xmlns:a="http://schemas.openxmlformats.org/drawingml/2006/main" r:embed="Rc567f63abe55439b"/>
           <a:srcRect xmlns:a="http://schemas.openxmlformats.org/drawingml/2006/main" l="10463" t="0" r="10463" b="0"/>
           <a:stretch xmlns:a="http://schemas.openxmlformats.org/drawingml/2006/main">
             <a:fillRect l="0" t="0" r="0" b="0"/>
@@ -15094,7 +15094,7 @@
           <p:nvPr/>
         </p:nvPicPr>
         <p:blipFill>
-          <a:blip xmlns:r="http://schemas.openxmlformats.org/officeDocument/2006/relationships" xmlns:a="http://schemas.openxmlformats.org/drawingml/2006/main" r:embed="R154ebccf9a9e4fd4"/>
+          <a:blip xmlns:r="http://schemas.openxmlformats.org/officeDocument/2006/relationships" xmlns:a="http://schemas.openxmlformats.org/drawingml/2006/main" r:embed="Re60e27f00c1b49b3"/>
           <a:srcRect xmlns:a="http://schemas.openxmlformats.org/drawingml/2006/main" l="0" t="2825" r="0" b="2825"/>
           <a:stretch xmlns:a="http://schemas.openxmlformats.org/drawingml/2006/main">
             <a:fillRect l="0" t="0" r="0" b="0"/>
@@ -15121,7 +15121,7 @@
           <p:nvPr/>
         </p:nvPicPr>
         <p:blipFill>
-          <a:blip xmlns:r="http://schemas.openxmlformats.org/officeDocument/2006/relationships" xmlns:a="http://schemas.openxmlformats.org/drawingml/2006/main" r:embed="Rad1acabb585a4289"/>
+          <a:blip xmlns:r="http://schemas.openxmlformats.org/officeDocument/2006/relationships" xmlns:a="http://schemas.openxmlformats.org/drawingml/2006/main" r:embed="R59a1ba7627564bc9"/>
           <a:srcRect xmlns:a="http://schemas.openxmlformats.org/drawingml/2006/main" l="0" t="5246" r="0" b="5246"/>
           <a:stretch xmlns:a="http://schemas.openxmlformats.org/drawingml/2006/main">
             <a:fillRect l="0" t="0" r="0" b="0"/>

--- a/outputs/Muhammad_Ali_Akbar_Al-Qahri_Portfolio_Minimal.pptx
+++ b/outputs/Muhammad_Ali_Akbar_Al-Qahri_Portfolio_Minimal.pptx
@@ -2,23 +2,23 @@
 <file path=ppt/presentation.xml><?xml version="1.0" encoding="utf-8"?>
 <p:presentation xmlns:p="http://schemas.openxmlformats.org/presentationml/2006/main">
   <p:sldMasterIdLst>
-    <p:sldMasterId xmlns:r="http://schemas.openxmlformats.org/officeDocument/2006/relationships" id="2147483648" r:id="Rdcc13abbc4254258"/>
+    <p:sldMasterId xmlns:r="http://schemas.openxmlformats.org/officeDocument/2006/relationships" id="2147483648" r:id="Re93534e79ea74483"/>
   </p:sldMasterIdLst>
   <p:notesMasterIdLst>
-    <p:notesMasterId xmlns:r="http://schemas.openxmlformats.org/officeDocument/2006/relationships" r:id="R6619fad3fce84f83"/>
+    <p:notesMasterId xmlns:r="http://schemas.openxmlformats.org/officeDocument/2006/relationships" r:id="Rb524e3fcaf254a75"/>
   </p:notesMasterIdLst>
   <p:sldIdLst>
-    <p:sldId xmlns:r="http://schemas.openxmlformats.org/officeDocument/2006/relationships" id="256" r:id="R347feb2bf53d453c"/>
-    <p:sldId xmlns:r="http://schemas.openxmlformats.org/officeDocument/2006/relationships" id="257" r:id="R7ea1ab817bc3453f"/>
-    <p:sldId xmlns:r="http://schemas.openxmlformats.org/officeDocument/2006/relationships" id="258" r:id="R925fcf9e2ba7419d"/>
-    <p:sldId xmlns:r="http://schemas.openxmlformats.org/officeDocument/2006/relationships" id="259" r:id="R0f2f2faacc484070"/>
-    <p:sldId xmlns:r="http://schemas.openxmlformats.org/officeDocument/2006/relationships" id="260" r:id="Rab1ce1976bab4fcd"/>
-    <p:sldId xmlns:r="http://schemas.openxmlformats.org/officeDocument/2006/relationships" id="261" r:id="R330645ab13114cad"/>
-    <p:sldId xmlns:r="http://schemas.openxmlformats.org/officeDocument/2006/relationships" id="262" r:id="Rd9e622a42d5049d3"/>
-    <p:sldId xmlns:r="http://schemas.openxmlformats.org/officeDocument/2006/relationships" id="263" r:id="Rba4526a53de747cd"/>
-    <p:sldId xmlns:r="http://schemas.openxmlformats.org/officeDocument/2006/relationships" id="264" r:id="Rdedb8c3895b043aa"/>
-    <p:sldId xmlns:r="http://schemas.openxmlformats.org/officeDocument/2006/relationships" id="265" r:id="R057db855ff6d4712"/>
-    <p:sldId xmlns:r="http://schemas.openxmlformats.org/officeDocument/2006/relationships" id="266" r:id="R4beb1c60706248ca"/>
+    <p:sldId xmlns:r="http://schemas.openxmlformats.org/officeDocument/2006/relationships" id="256" r:id="Rb1d3a0d99b6241db"/>
+    <p:sldId xmlns:r="http://schemas.openxmlformats.org/officeDocument/2006/relationships" id="257" r:id="R43b1576311f54b6e"/>
+    <p:sldId xmlns:r="http://schemas.openxmlformats.org/officeDocument/2006/relationships" id="258" r:id="R54da300d612a4345"/>
+    <p:sldId xmlns:r="http://schemas.openxmlformats.org/officeDocument/2006/relationships" id="259" r:id="R21ae3d4c48874739"/>
+    <p:sldId xmlns:r="http://schemas.openxmlformats.org/officeDocument/2006/relationships" id="260" r:id="Rbd67f0bb09ba4876"/>
+    <p:sldId xmlns:r="http://schemas.openxmlformats.org/officeDocument/2006/relationships" id="261" r:id="R50065fa66a8b47b1"/>
+    <p:sldId xmlns:r="http://schemas.openxmlformats.org/officeDocument/2006/relationships" id="262" r:id="Rebf699dbf24247dc"/>
+    <p:sldId xmlns:r="http://schemas.openxmlformats.org/officeDocument/2006/relationships" id="263" r:id="Rfac8d444573d4b4e"/>
+    <p:sldId xmlns:r="http://schemas.openxmlformats.org/officeDocument/2006/relationships" id="264" r:id="R0d0cce0fca29434b"/>
+    <p:sldId xmlns:r="http://schemas.openxmlformats.org/officeDocument/2006/relationships" id="265" r:id="R13b0462104c44051"/>
+    <p:sldId xmlns:r="http://schemas.openxmlformats.org/officeDocument/2006/relationships" id="266" r:id="Ra84ec83bfd944701"/>
   </p:sldIdLst>
   <p:sldSz cx="12192000" cy="6858000"/>
   <p:notesSz cx="6858000" cy="9144000"/>
@@ -1271,7 +1271,7 @@
   </p:cSld>
   <p:clrMap bg1="lt1" tx1="dk1" bg2="lt2" tx2="dk2" accent1="accent1" accent2="accent2" accent3="accent3" accent4="accent4" accent5="accent5" accent6="accent6" hlink="hlink" folHlink="folHlink"/>
   <p:sldLayoutIdLst>
-    <p:sldLayoutId xmlns:r="http://schemas.openxmlformats.org/officeDocument/2006/relationships" id="2147483649" r:id="R88b579e820b144e6"/>
+    <p:sldLayoutId xmlns:r="http://schemas.openxmlformats.org/officeDocument/2006/relationships" id="2147483649" r:id="R213fe65b11c043d6"/>
   </p:sldLayoutIdLst>
   <p:txStyles>
     <p:titleStyle>
@@ -2840,7 +2840,7 @@
                 <a:latin typeface="Aptos"/>
                 <a:ea typeface="Aptos"/>
                 <a:cs typeface="Aptos"/>
-                <a:hlinkClick xmlns:r="http://schemas.openxmlformats.org/officeDocument/2006/relationships" r:id="R8bfcc0f9918842fc"/>
+                <a:hlinkClick xmlns:r="http://schemas.openxmlformats.org/officeDocument/2006/relationships" r:id="Ra9b1d8b5ec014e07"/>
               </a:rPr>
               <a:t>OPEN THE COMPLETE WEB PORTFOLIO</a:t>
             </a:r>
@@ -2861,7 +2861,7 @@
                 <a:latin typeface="Consolas"/>
                 <a:ea typeface="Consolas"/>
                 <a:cs typeface="Consolas"/>
-                <a:hlinkClick xmlns:r="http://schemas.openxmlformats.org/officeDocument/2006/relationships" r:id="Rb4e843b81f124b38"/>
+                <a:hlinkClick xmlns:r="http://schemas.openxmlformats.org/officeDocument/2006/relationships" r:id="R663e65fe62114d46"/>
               </a:rPr>
               <a:t>akbaralqahri.github.io/portofolio</a:t>
             </a:r>
@@ -3084,7 +3084,7 @@
           <p:nvPr/>
         </p:nvPicPr>
         <p:blipFill>
-          <a:blip xmlns:r="http://schemas.openxmlformats.org/officeDocument/2006/relationships" xmlns:a="http://schemas.openxmlformats.org/drawingml/2006/main" r:embed="R68c521ce6abf4c57"/>
+          <a:blip xmlns:r="http://schemas.openxmlformats.org/officeDocument/2006/relationships" xmlns:a="http://schemas.openxmlformats.org/drawingml/2006/main" r:embed="R0dc3f6da909d4004"/>
           <a:srcRect xmlns:a="http://schemas.openxmlformats.org/drawingml/2006/main" l="0" t="28690" r="0" b="28690"/>
           <a:stretch xmlns:a="http://schemas.openxmlformats.org/drawingml/2006/main">
             <a:fillRect l="0" t="0" r="0" b="0"/>
@@ -5060,7 +5060,7 @@
                 <a:latin typeface="Aptos"/>
                 <a:ea typeface="Aptos"/>
                 <a:cs typeface="Aptos"/>
-                <a:hlinkClick xmlns:r="http://schemas.openxmlformats.org/officeDocument/2006/relationships" r:id="Rb028d1914756444b"/>
+                <a:hlinkClick xmlns:r="http://schemas.openxmlformats.org/officeDocument/2006/relationships" r:id="R0add6accbb5d4509"/>
               </a:rPr>
               <a:t>OPEN THE WEB PORTFOLIO</a:t>
             </a:r>
@@ -5081,7 +5081,7 @@
                 <a:latin typeface="Consolas"/>
                 <a:ea typeface="Consolas"/>
                 <a:cs typeface="Consolas"/>
-                <a:hlinkClick xmlns:r="http://schemas.openxmlformats.org/officeDocument/2006/relationships" r:id="R39cff000f5c241fa"/>
+                <a:hlinkClick xmlns:r="http://schemas.openxmlformats.org/officeDocument/2006/relationships" r:id="R9ae45b9719f74cbe"/>
               </a:rPr>
               <a:t>akbaralqahri.github.io/portofolio</a:t>
             </a:r>
@@ -5453,7 +5453,7 @@
                 <a:latin typeface="Aptos"/>
                 <a:ea typeface="Aptos"/>
                 <a:cs typeface="Aptos"/>
-                <a:hlinkClick xmlns:r="http://schemas.openxmlformats.org/officeDocument/2006/relationships" r:id="Rdea7bef2239645de"/>
+                <a:hlinkClick xmlns:r="http://schemas.openxmlformats.org/officeDocument/2006/relationships" r:id="Rd8bdb042aea64313"/>
               </a:rPr>
               <a:t>LINKEDIN · linkedin.com/in/akbaralqahri</a:t>
             </a:r>
@@ -5474,7 +5474,7 @@
                 <a:latin typeface="Aptos"/>
                 <a:ea typeface="Aptos"/>
                 <a:cs typeface="Aptos"/>
-                <a:hlinkClick xmlns:r="http://schemas.openxmlformats.org/officeDocument/2006/relationships" r:id="R84f968eb88df466a"/>
+                <a:hlinkClick xmlns:r="http://schemas.openxmlformats.org/officeDocument/2006/relationships" r:id="Rd1ec58b897aa409e"/>
               </a:rPr>
               <a:t>WEB PORTFOLIO · akbaralqahri.github.io/portofolio</a:t>
             </a:r>
@@ -5598,7 +5598,7 @@
           <p:nvPr/>
         </p:nvPicPr>
         <p:blipFill>
-          <a:blip xmlns:r="http://schemas.openxmlformats.org/officeDocument/2006/relationships" xmlns:a="http://schemas.openxmlformats.org/drawingml/2006/main" r:embed="Rb47c392991fa4ff0"/>
+          <a:blip xmlns:r="http://schemas.openxmlformats.org/officeDocument/2006/relationships" xmlns:a="http://schemas.openxmlformats.org/drawingml/2006/main" r:embed="R9c5a743ee8234a04"/>
           <a:srcRect xmlns:a="http://schemas.openxmlformats.org/drawingml/2006/main" l="0" t="5980" r="0" b="5980"/>
           <a:stretch xmlns:a="http://schemas.openxmlformats.org/drawingml/2006/main">
             <a:fillRect l="0" t="0" r="0" b="0"/>
@@ -10801,7 +10801,7 @@
                 <a:latin typeface="Aptos"/>
                 <a:ea typeface="Aptos"/>
                 <a:cs typeface="Aptos"/>
-                <a:hlinkClick xmlns:r="http://schemas.openxmlformats.org/officeDocument/2006/relationships" r:id="R280fbd81f0fe4a5e"/>
+                <a:hlinkClick xmlns:r="http://schemas.openxmlformats.org/officeDocument/2006/relationships" r:id="R148ad8a4c94e428b"/>
               </a:rPr>
               <a:t>OPEN PETA KEMISKINAN ↗</a:t>
             </a:r>
@@ -11024,7 +11024,7 @@
           <p:nvPr/>
         </p:nvPicPr>
         <p:blipFill>
-          <a:blip xmlns:r="http://schemas.openxmlformats.org/officeDocument/2006/relationships" xmlns:a="http://schemas.openxmlformats.org/drawingml/2006/main" r:embed="R7f059377d6ec42eb"/>
+          <a:blip xmlns:r="http://schemas.openxmlformats.org/officeDocument/2006/relationships" xmlns:a="http://schemas.openxmlformats.org/drawingml/2006/main" r:embed="R0be8cb4dfcc2494a"/>
           <a:srcRect xmlns:a="http://schemas.openxmlformats.org/drawingml/2006/main" l="0" t="16819" r="0" b="16819"/>
           <a:stretch xmlns:a="http://schemas.openxmlformats.org/drawingml/2006/main">
             <a:fillRect l="0" t="0" r="0" b="0"/>
@@ -11991,7 +11991,7 @@
           <p:nvPr/>
         </p:nvPicPr>
         <p:blipFill>
-          <a:blip xmlns:r="http://schemas.openxmlformats.org/officeDocument/2006/relationships" xmlns:a="http://schemas.openxmlformats.org/drawingml/2006/main" r:embed="R14b2ec6b512b4fb1"/>
+          <a:blip xmlns:r="http://schemas.openxmlformats.org/officeDocument/2006/relationships" xmlns:a="http://schemas.openxmlformats.org/drawingml/2006/main" r:embed="R574accc41120413a"/>
           <a:srcRect xmlns:a="http://schemas.openxmlformats.org/drawingml/2006/main" l="0" t="5719" r="0" b="5719"/>
           <a:stretch xmlns:a="http://schemas.openxmlformats.org/drawingml/2006/main">
             <a:fillRect l="0" t="0" r="0" b="0"/>
@@ -12018,7 +12018,7 @@
           <p:nvPr/>
         </p:nvPicPr>
         <p:blipFill>
-          <a:blip xmlns:r="http://schemas.openxmlformats.org/officeDocument/2006/relationships" xmlns:a="http://schemas.openxmlformats.org/drawingml/2006/main" r:embed="R64d078c2d1ef40d0"/>
+          <a:blip xmlns:r="http://schemas.openxmlformats.org/officeDocument/2006/relationships" xmlns:a="http://schemas.openxmlformats.org/drawingml/2006/main" r:embed="R04e76573a456484e"/>
           <a:srcRect xmlns:a="http://schemas.openxmlformats.org/drawingml/2006/main" l="0" t="5719" r="0" b="5719"/>
           <a:stretch xmlns:a="http://schemas.openxmlformats.org/drawingml/2006/main">
             <a:fillRect l="0" t="0" r="0" b="0"/>
@@ -13017,7 +13017,7 @@
           <p:nvPr/>
         </p:nvPicPr>
         <p:blipFill>
-          <a:blip xmlns:r="http://schemas.openxmlformats.org/officeDocument/2006/relationships" xmlns:a="http://schemas.openxmlformats.org/drawingml/2006/main" r:embed="Re25a45c6f5eb4f6d"/>
+          <a:blip xmlns:r="http://schemas.openxmlformats.org/officeDocument/2006/relationships" xmlns:a="http://schemas.openxmlformats.org/drawingml/2006/main" r:embed="R2c93be3a933f48e9"/>
           <a:stretch xmlns:a="http://schemas.openxmlformats.org/drawingml/2006/main"/>
         </p:blipFill>
         <p:spPr>
@@ -13041,7 +13041,7 @@
           <p:nvPr/>
         </p:nvPicPr>
         <p:blipFill>
-          <a:blip xmlns:r="http://schemas.openxmlformats.org/officeDocument/2006/relationships" xmlns:a="http://schemas.openxmlformats.org/drawingml/2006/main" r:embed="R71945bd7710b43ae"/>
+          <a:blip xmlns:r="http://schemas.openxmlformats.org/officeDocument/2006/relationships" xmlns:a="http://schemas.openxmlformats.org/drawingml/2006/main" r:embed="Re14cb9a244894f00"/>
           <a:stretch xmlns:a="http://schemas.openxmlformats.org/drawingml/2006/main"/>
         </p:blipFill>
         <p:spPr>
@@ -14083,7 +14083,7 @@
           <p:nvPr/>
         </p:nvPicPr>
         <p:blipFill>
-          <a:blip xmlns:r="http://schemas.openxmlformats.org/officeDocument/2006/relationships" xmlns:a="http://schemas.openxmlformats.org/drawingml/2006/main" r:embed="R178f17ccf9144646"/>
+          <a:blip xmlns:r="http://schemas.openxmlformats.org/officeDocument/2006/relationships" xmlns:a="http://schemas.openxmlformats.org/drawingml/2006/main" r:embed="R1855f3b6bd8e4b9c"/>
           <a:srcRect xmlns:a="http://schemas.openxmlformats.org/drawingml/2006/main" l="0" t="4261" r="0" b="4261"/>
           <a:stretch xmlns:a="http://schemas.openxmlformats.org/drawingml/2006/main">
             <a:fillRect l="0" t="0" r="0" b="0"/>
@@ -15069,7 +15069,7 @@
           <p:nvPr/>
         </p:nvPicPr>
         <p:blipFill>
-          <a:blip xmlns:r="http://schemas.openxmlformats.org/officeDocument/2006/relationships" xmlns:a="http://schemas.openxmlformats.org/drawingml/2006/main" r:embed="Rc567f63abe55439b"/>
+          <a:blip xmlns:r="http://schemas.openxmlformats.org/officeDocument/2006/relationships" xmlns:a="http://schemas.openxmlformats.org/drawingml/2006/main" r:embed="R639bc4c2ec604948"/>
           <a:srcRect xmlns:a="http://schemas.openxmlformats.org/drawingml/2006/main" l="10463" t="0" r="10463" b="0"/>
           <a:stretch xmlns:a="http://schemas.openxmlformats.org/drawingml/2006/main">
             <a:fillRect l="0" t="0" r="0" b="0"/>
@@ -15094,7 +15094,7 @@
           <p:nvPr/>
         </p:nvPicPr>
         <p:blipFill>
-          <a:blip xmlns:r="http://schemas.openxmlformats.org/officeDocument/2006/relationships" xmlns:a="http://schemas.openxmlformats.org/drawingml/2006/main" r:embed="Re60e27f00c1b49b3"/>
+          <a:blip xmlns:r="http://schemas.openxmlformats.org/officeDocument/2006/relationships" xmlns:a="http://schemas.openxmlformats.org/drawingml/2006/main" r:embed="Rcf3358ce9b20436b"/>
           <a:srcRect xmlns:a="http://schemas.openxmlformats.org/drawingml/2006/main" l="0" t="2825" r="0" b="2825"/>
           <a:stretch xmlns:a="http://schemas.openxmlformats.org/drawingml/2006/main">
             <a:fillRect l="0" t="0" r="0" b="0"/>
@@ -15121,7 +15121,7 @@
           <p:nvPr/>
         </p:nvPicPr>
         <p:blipFill>
-          <a:blip xmlns:r="http://schemas.openxmlformats.org/officeDocument/2006/relationships" xmlns:a="http://schemas.openxmlformats.org/drawingml/2006/main" r:embed="R59a1ba7627564bc9"/>
+          <a:blip xmlns:r="http://schemas.openxmlformats.org/officeDocument/2006/relationships" xmlns:a="http://schemas.openxmlformats.org/drawingml/2006/main" r:embed="R4a76b790473c4a2e"/>
           <a:srcRect xmlns:a="http://schemas.openxmlformats.org/drawingml/2006/main" l="0" t="5246" r="0" b="5246"/>
           <a:stretch xmlns:a="http://schemas.openxmlformats.org/drawingml/2006/main">
             <a:fillRect l="0" t="0" r="0" b="0"/>
